--- a/docs/presentation.pptx
+++ b/docs/presentation.pptx
@@ -17,6 +17,7 @@
     <p:sldId id="265" r:id="rId11"/>
     <p:sldId id="266" r:id="rId12"/>
     <p:sldId id="267" r:id="rId13"/>
+    <p:sldId id="274" r:id="rId25"/>
     <p:sldId id="268" r:id="rId14"/>
     <p:sldId id="269" r:id="rId15"/>
     <p:sldId id="270" r:id="rId16"/>
@@ -1465,86 +1466,84 @@
             <c:showLeaderLines val="0"/>
           </c:dLbls>
           <c:cat>
-            <c:multiLvlStrRef>
+            <c:strRef>
               <c:f>Sheet1!$A$2:$A$25</c:f>
-              <c:multiLvlStrCache>
+              <c:strCache>
                 <c:ptCount val="24"/>
-                <c:lvl>
-                  <c:pt idx="0">
-                    <c:v>янв 23</c:v>
-                  </c:pt>
-                  <c:pt idx="1">
-                    <c:v>фев 23</c:v>
-                  </c:pt>
-                  <c:pt idx="2">
-                    <c:v>мар 23</c:v>
-                  </c:pt>
-                  <c:pt idx="3">
-                    <c:v>апр 23</c:v>
-                  </c:pt>
-                  <c:pt idx="4">
-                    <c:v>май 23</c:v>
-                  </c:pt>
-                  <c:pt idx="5">
-                    <c:v>июн 23</c:v>
-                  </c:pt>
-                  <c:pt idx="6">
-                    <c:v>июл 23</c:v>
-                  </c:pt>
-                  <c:pt idx="7">
-                    <c:v>авг 23</c:v>
-                  </c:pt>
-                  <c:pt idx="8">
-                    <c:v>сен 23</c:v>
-                  </c:pt>
-                  <c:pt idx="9">
-                    <c:v>окт 23</c:v>
-                  </c:pt>
-                  <c:pt idx="10">
-                    <c:v>ноя 23</c:v>
-                  </c:pt>
-                  <c:pt idx="11">
-                    <c:v>дек 23</c:v>
-                  </c:pt>
-                  <c:pt idx="12">
-                    <c:v>янв 24</c:v>
-                  </c:pt>
-                  <c:pt idx="13">
-                    <c:v>фев 24</c:v>
-                  </c:pt>
-                  <c:pt idx="14">
-                    <c:v>мар 24</c:v>
-                  </c:pt>
-                  <c:pt idx="15">
-                    <c:v>апр 24</c:v>
-                  </c:pt>
-                  <c:pt idx="16">
-                    <c:v>май 24</c:v>
-                  </c:pt>
-                  <c:pt idx="17">
-                    <c:v>июн 24</c:v>
-                  </c:pt>
-                  <c:pt idx="18">
-                    <c:v>июл 24</c:v>
-                  </c:pt>
-                  <c:pt idx="19">
-                    <c:v>авг 24</c:v>
-                  </c:pt>
-                  <c:pt idx="20">
-                    <c:v>сен 24</c:v>
-                  </c:pt>
-                  <c:pt idx="21">
-                    <c:v>окт 24</c:v>
-                  </c:pt>
-                  <c:pt idx="22">
-                    <c:v>ноя 24</c:v>
-                  </c:pt>
-                  <c:pt idx="23">
-                    <c:v>дек 24</c:v>
-                  </c:pt>
-                </c:lvl>
-              </c:multiLvlStrCache>
-            </c:multiLvlStrRef>
+                <c:pt idx="0">
+                  <c:v>янв 23</c:v>
+                </c:pt>
+                <c:pt idx="1">
+                  <c:v>фев 23</c:v>
+                </c:pt>
+                <c:pt idx="2">
+                  <c:v>мар 23</c:v>
+                </c:pt>
+                <c:pt idx="3">
+                  <c:v>апр 23</c:v>
+                </c:pt>
+                <c:pt idx="4">
+                  <c:v>май 23</c:v>
+                </c:pt>
+                <c:pt idx="5">
+                  <c:v>июн 23</c:v>
+                </c:pt>
+                <c:pt idx="6">
+                  <c:v>июл 23</c:v>
+                </c:pt>
+                <c:pt idx="7">
+                  <c:v>авг 23</c:v>
+                </c:pt>
+                <c:pt idx="8">
+                  <c:v>сен 23</c:v>
+                </c:pt>
+                <c:pt idx="9">
+                  <c:v>окт 23</c:v>
+                </c:pt>
+                <c:pt idx="10">
+                  <c:v>ноя 23</c:v>
+                </c:pt>
+                <c:pt idx="11">
+                  <c:v>дек 23</c:v>
+                </c:pt>
+                <c:pt idx="12">
+                  <c:v>янв 24</c:v>
+                </c:pt>
+                <c:pt idx="13">
+                  <c:v>фев 24</c:v>
+                </c:pt>
+                <c:pt idx="14">
+                  <c:v>мар 24</c:v>
+                </c:pt>
+                <c:pt idx="15">
+                  <c:v>апр 24</c:v>
+                </c:pt>
+                <c:pt idx="16">
+                  <c:v>май 24</c:v>
+                </c:pt>
+                <c:pt idx="17">
+                  <c:v>июн 24</c:v>
+                </c:pt>
+                <c:pt idx="18">
+                  <c:v>июл 24</c:v>
+                </c:pt>
+                <c:pt idx="19">
+                  <c:v>авг 24</c:v>
+                </c:pt>
+                <c:pt idx="20">
+                  <c:v>сен 24</c:v>
+                </c:pt>
+                <c:pt idx="21">
+                  <c:v>окт 24</c:v>
+                </c:pt>
+                <c:pt idx="22">
+                  <c:v>ноя 24</c:v>
+                </c:pt>
+                <c:pt idx="23">
+                  <c:v>дек 24</c:v>
+                </c:pt>
+              </c:strCache>
+            </c:strRef>
           </c:cat>
           <c:val>
             <c:numRef>
@@ -1571,7 +1570,7 @@
                   <c:v>2.9</c:v>
                 </c:pt>
                 <c:pt idx="6">
-                  <c:v>3</c:v>
+                  <c:v>3.0</c:v>
                 </c:pt>
                 <c:pt idx="7">
                   <c:v>3.1</c:v>
@@ -1674,86 +1673,84 @@
             <c:showLeaderLines val="0"/>
           </c:dLbls>
           <c:cat>
-            <c:multiLvlStrRef>
+            <c:strRef>
               <c:f>Sheet1!$A$2:$A$25</c:f>
-              <c:multiLvlStrCache>
+              <c:strCache>
                 <c:ptCount val="24"/>
-                <c:lvl>
-                  <c:pt idx="0">
-                    <c:v>янв 23</c:v>
-                  </c:pt>
-                  <c:pt idx="1">
-                    <c:v>фев 23</c:v>
-                  </c:pt>
-                  <c:pt idx="2">
-                    <c:v>мар 23</c:v>
-                  </c:pt>
-                  <c:pt idx="3">
-                    <c:v>апр 23</c:v>
-                  </c:pt>
-                  <c:pt idx="4">
-                    <c:v>май 23</c:v>
-                  </c:pt>
-                  <c:pt idx="5">
-                    <c:v>июн 23</c:v>
-                  </c:pt>
-                  <c:pt idx="6">
-                    <c:v>июл 23</c:v>
-                  </c:pt>
-                  <c:pt idx="7">
-                    <c:v>авг 23</c:v>
-                  </c:pt>
-                  <c:pt idx="8">
-                    <c:v>сен 23</c:v>
-                  </c:pt>
-                  <c:pt idx="9">
-                    <c:v>окт 23</c:v>
-                  </c:pt>
-                  <c:pt idx="10">
-                    <c:v>ноя 23</c:v>
-                  </c:pt>
-                  <c:pt idx="11">
-                    <c:v>дек 23</c:v>
-                  </c:pt>
-                  <c:pt idx="12">
-                    <c:v>янв 24</c:v>
-                  </c:pt>
-                  <c:pt idx="13">
-                    <c:v>фев 24</c:v>
-                  </c:pt>
-                  <c:pt idx="14">
-                    <c:v>мар 24</c:v>
-                  </c:pt>
-                  <c:pt idx="15">
-                    <c:v>апр 24</c:v>
-                  </c:pt>
-                  <c:pt idx="16">
-                    <c:v>май 24</c:v>
-                  </c:pt>
-                  <c:pt idx="17">
-                    <c:v>июн 24</c:v>
-                  </c:pt>
-                  <c:pt idx="18">
-                    <c:v>июл 24</c:v>
-                  </c:pt>
-                  <c:pt idx="19">
-                    <c:v>авг 24</c:v>
-                  </c:pt>
-                  <c:pt idx="20">
-                    <c:v>сен 24</c:v>
-                  </c:pt>
-                  <c:pt idx="21">
-                    <c:v>окт 24</c:v>
-                  </c:pt>
-                  <c:pt idx="22">
-                    <c:v>ноя 24</c:v>
-                  </c:pt>
-                  <c:pt idx="23">
-                    <c:v>дек 24</c:v>
-                  </c:pt>
-                </c:lvl>
-              </c:multiLvlStrCache>
-            </c:multiLvlStrRef>
+                <c:pt idx="0">
+                  <c:v>янв 23</c:v>
+                </c:pt>
+                <c:pt idx="1">
+                  <c:v>фев 23</c:v>
+                </c:pt>
+                <c:pt idx="2">
+                  <c:v>мар 23</c:v>
+                </c:pt>
+                <c:pt idx="3">
+                  <c:v>апр 23</c:v>
+                </c:pt>
+                <c:pt idx="4">
+                  <c:v>май 23</c:v>
+                </c:pt>
+                <c:pt idx="5">
+                  <c:v>июн 23</c:v>
+                </c:pt>
+                <c:pt idx="6">
+                  <c:v>июл 23</c:v>
+                </c:pt>
+                <c:pt idx="7">
+                  <c:v>авг 23</c:v>
+                </c:pt>
+                <c:pt idx="8">
+                  <c:v>сен 23</c:v>
+                </c:pt>
+                <c:pt idx="9">
+                  <c:v>окт 23</c:v>
+                </c:pt>
+                <c:pt idx="10">
+                  <c:v>ноя 23</c:v>
+                </c:pt>
+                <c:pt idx="11">
+                  <c:v>дек 23</c:v>
+                </c:pt>
+                <c:pt idx="12">
+                  <c:v>янв 24</c:v>
+                </c:pt>
+                <c:pt idx="13">
+                  <c:v>фев 24</c:v>
+                </c:pt>
+                <c:pt idx="14">
+                  <c:v>мар 24</c:v>
+                </c:pt>
+                <c:pt idx="15">
+                  <c:v>апр 24</c:v>
+                </c:pt>
+                <c:pt idx="16">
+                  <c:v>май 24</c:v>
+                </c:pt>
+                <c:pt idx="17">
+                  <c:v>июн 24</c:v>
+                </c:pt>
+                <c:pt idx="18">
+                  <c:v>июл 24</c:v>
+                </c:pt>
+                <c:pt idx="19">
+                  <c:v>авг 24</c:v>
+                </c:pt>
+                <c:pt idx="20">
+                  <c:v>сен 24</c:v>
+                </c:pt>
+                <c:pt idx="21">
+                  <c:v>окт 24</c:v>
+                </c:pt>
+                <c:pt idx="22">
+                  <c:v>ноя 24</c:v>
+                </c:pt>
+                <c:pt idx="23">
+                  <c:v>дек 24</c:v>
+                </c:pt>
+              </c:strCache>
+            </c:strRef>
           </c:cat>
           <c:val>
             <c:numRef>
@@ -1777,7 +1774,7 @@
                   <c:v>3.1</c:v>
                 </c:pt>
                 <c:pt idx="5">
-                  <c:v>3</c:v>
+                  <c:v>3.0</c:v>
                 </c:pt>
                 <c:pt idx="6">
                   <c:v>2.8</c:v>
@@ -1883,86 +1880,84 @@
             <c:showLeaderLines val="0"/>
           </c:dLbls>
           <c:cat>
-            <c:multiLvlStrRef>
+            <c:strRef>
               <c:f>Sheet1!$A$2:$A$25</c:f>
-              <c:multiLvlStrCache>
+              <c:strCache>
                 <c:ptCount val="24"/>
-                <c:lvl>
-                  <c:pt idx="0">
-                    <c:v>янв 23</c:v>
-                  </c:pt>
-                  <c:pt idx="1">
-                    <c:v>фев 23</c:v>
-                  </c:pt>
-                  <c:pt idx="2">
-                    <c:v>мар 23</c:v>
-                  </c:pt>
-                  <c:pt idx="3">
-                    <c:v>апр 23</c:v>
-                  </c:pt>
-                  <c:pt idx="4">
-                    <c:v>май 23</c:v>
-                  </c:pt>
-                  <c:pt idx="5">
-                    <c:v>июн 23</c:v>
-                  </c:pt>
-                  <c:pt idx="6">
-                    <c:v>июл 23</c:v>
-                  </c:pt>
-                  <c:pt idx="7">
-                    <c:v>авг 23</c:v>
-                  </c:pt>
-                  <c:pt idx="8">
-                    <c:v>сен 23</c:v>
-                  </c:pt>
-                  <c:pt idx="9">
-                    <c:v>окт 23</c:v>
-                  </c:pt>
-                  <c:pt idx="10">
-                    <c:v>ноя 23</c:v>
-                  </c:pt>
-                  <c:pt idx="11">
-                    <c:v>дек 23</c:v>
-                  </c:pt>
-                  <c:pt idx="12">
-                    <c:v>янв 24</c:v>
-                  </c:pt>
-                  <c:pt idx="13">
-                    <c:v>фев 24</c:v>
-                  </c:pt>
-                  <c:pt idx="14">
-                    <c:v>мар 24</c:v>
-                  </c:pt>
-                  <c:pt idx="15">
-                    <c:v>апр 24</c:v>
-                  </c:pt>
-                  <c:pt idx="16">
-                    <c:v>май 24</c:v>
-                  </c:pt>
-                  <c:pt idx="17">
-                    <c:v>июн 24</c:v>
-                  </c:pt>
-                  <c:pt idx="18">
-                    <c:v>июл 24</c:v>
-                  </c:pt>
-                  <c:pt idx="19">
-                    <c:v>авг 24</c:v>
-                  </c:pt>
-                  <c:pt idx="20">
-                    <c:v>сен 24</c:v>
-                  </c:pt>
-                  <c:pt idx="21">
-                    <c:v>окт 24</c:v>
-                  </c:pt>
-                  <c:pt idx="22">
-                    <c:v>ноя 24</c:v>
-                  </c:pt>
-                  <c:pt idx="23">
-                    <c:v>дек 24</c:v>
-                  </c:pt>
-                </c:lvl>
-              </c:multiLvlStrCache>
-            </c:multiLvlStrRef>
+                <c:pt idx="0">
+                  <c:v>янв 23</c:v>
+                </c:pt>
+                <c:pt idx="1">
+                  <c:v>фев 23</c:v>
+                </c:pt>
+                <c:pt idx="2">
+                  <c:v>мар 23</c:v>
+                </c:pt>
+                <c:pt idx="3">
+                  <c:v>апр 23</c:v>
+                </c:pt>
+                <c:pt idx="4">
+                  <c:v>май 23</c:v>
+                </c:pt>
+                <c:pt idx="5">
+                  <c:v>июн 23</c:v>
+                </c:pt>
+                <c:pt idx="6">
+                  <c:v>июл 23</c:v>
+                </c:pt>
+                <c:pt idx="7">
+                  <c:v>авг 23</c:v>
+                </c:pt>
+                <c:pt idx="8">
+                  <c:v>сен 23</c:v>
+                </c:pt>
+                <c:pt idx="9">
+                  <c:v>окт 23</c:v>
+                </c:pt>
+                <c:pt idx="10">
+                  <c:v>ноя 23</c:v>
+                </c:pt>
+                <c:pt idx="11">
+                  <c:v>дек 23</c:v>
+                </c:pt>
+                <c:pt idx="12">
+                  <c:v>янв 24</c:v>
+                </c:pt>
+                <c:pt idx="13">
+                  <c:v>фев 24</c:v>
+                </c:pt>
+                <c:pt idx="14">
+                  <c:v>мар 24</c:v>
+                </c:pt>
+                <c:pt idx="15">
+                  <c:v>апр 24</c:v>
+                </c:pt>
+                <c:pt idx="16">
+                  <c:v>май 24</c:v>
+                </c:pt>
+                <c:pt idx="17">
+                  <c:v>июн 24</c:v>
+                </c:pt>
+                <c:pt idx="18">
+                  <c:v>июл 24</c:v>
+                </c:pt>
+                <c:pt idx="19">
+                  <c:v>авг 24</c:v>
+                </c:pt>
+                <c:pt idx="20">
+                  <c:v>сен 24</c:v>
+                </c:pt>
+                <c:pt idx="21">
+                  <c:v>окт 24</c:v>
+                </c:pt>
+                <c:pt idx="22">
+                  <c:v>ноя 24</c:v>
+                </c:pt>
+                <c:pt idx="23">
+                  <c:v>дек 24</c:v>
+                </c:pt>
+              </c:strCache>
+            </c:strRef>
           </c:cat>
           <c:val>
             <c:numRef>
@@ -1977,22 +1972,22 @@
                   <c:v>5.2</c:v>
                 </c:pt>
                 <c:pt idx="2">
-                  <c:v>5</c:v>
+                  <c:v>5.0</c:v>
                 </c:pt>
                 <c:pt idx="3">
-                  <c:v>5</c:v>
+                  <c:v>5.0</c:v>
                 </c:pt>
                 <c:pt idx="4">
                   <c:v>4.9</c:v>
                 </c:pt>
                 <c:pt idx="5">
-                  <c:v>5</c:v>
+                  <c:v>5.0</c:v>
                 </c:pt>
                 <c:pt idx="6">
                   <c:v>4.8</c:v>
                 </c:pt>
                 <c:pt idx="7">
-                  <c:v>5</c:v>
+                  <c:v>5.0</c:v>
                 </c:pt>
                 <c:pt idx="8">
                   <c:v>4.9</c:v>
@@ -2001,10 +1996,10 @@
                   <c:v>4.8</c:v>
                 </c:pt>
                 <c:pt idx="10">
-                  <c:v>5</c:v>
+                  <c:v>5.0</c:v>
                 </c:pt>
                 <c:pt idx="11">
-                  <c:v>5</c:v>
+                  <c:v>5.0</c:v>
                 </c:pt>
                 <c:pt idx="12">
                   <c:v>5.1</c:v>
@@ -2031,7 +2026,7 @@
                   <c:v>2.6</c:v>
                 </c:pt>
                 <c:pt idx="20">
-                  <c:v>3</c:v>
+                  <c:v>3.0</c:v>
                 </c:pt>
                 <c:pt idx="21">
                   <c:v>3.7</c:v>
@@ -2092,86 +2087,84 @@
             <c:showLeaderLines val="0"/>
           </c:dLbls>
           <c:cat>
-            <c:multiLvlStrRef>
+            <c:strRef>
               <c:f>Sheet1!$A$2:$A$25</c:f>
-              <c:multiLvlStrCache>
+              <c:strCache>
                 <c:ptCount val="24"/>
-                <c:lvl>
-                  <c:pt idx="0">
-                    <c:v>янв 23</c:v>
-                  </c:pt>
-                  <c:pt idx="1">
-                    <c:v>фев 23</c:v>
-                  </c:pt>
-                  <c:pt idx="2">
-                    <c:v>мар 23</c:v>
-                  </c:pt>
-                  <c:pt idx="3">
-                    <c:v>апр 23</c:v>
-                  </c:pt>
-                  <c:pt idx="4">
-                    <c:v>май 23</c:v>
-                  </c:pt>
-                  <c:pt idx="5">
-                    <c:v>июн 23</c:v>
-                  </c:pt>
-                  <c:pt idx="6">
-                    <c:v>июл 23</c:v>
-                  </c:pt>
-                  <c:pt idx="7">
-                    <c:v>авг 23</c:v>
-                  </c:pt>
-                  <c:pt idx="8">
-                    <c:v>сен 23</c:v>
-                  </c:pt>
-                  <c:pt idx="9">
-                    <c:v>окт 23</c:v>
-                  </c:pt>
-                  <c:pt idx="10">
-                    <c:v>ноя 23</c:v>
-                  </c:pt>
-                  <c:pt idx="11">
-                    <c:v>дек 23</c:v>
-                  </c:pt>
-                  <c:pt idx="12">
-                    <c:v>янв 24</c:v>
-                  </c:pt>
-                  <c:pt idx="13">
-                    <c:v>фев 24</c:v>
-                  </c:pt>
-                  <c:pt idx="14">
-                    <c:v>мар 24</c:v>
-                  </c:pt>
-                  <c:pt idx="15">
-                    <c:v>апр 24</c:v>
-                  </c:pt>
-                  <c:pt idx="16">
-                    <c:v>май 24</c:v>
-                  </c:pt>
-                  <c:pt idx="17">
-                    <c:v>июн 24</c:v>
-                  </c:pt>
-                  <c:pt idx="18">
-                    <c:v>июл 24</c:v>
-                  </c:pt>
-                  <c:pt idx="19">
-                    <c:v>авг 24</c:v>
-                  </c:pt>
-                  <c:pt idx="20">
-                    <c:v>сен 24</c:v>
-                  </c:pt>
-                  <c:pt idx="21">
-                    <c:v>окт 24</c:v>
-                  </c:pt>
-                  <c:pt idx="22">
-                    <c:v>ноя 24</c:v>
-                  </c:pt>
-                  <c:pt idx="23">
-                    <c:v>дек 24</c:v>
-                  </c:pt>
-                </c:lvl>
-              </c:multiLvlStrCache>
-            </c:multiLvlStrRef>
+                <c:pt idx="0">
+                  <c:v>янв 23</c:v>
+                </c:pt>
+                <c:pt idx="1">
+                  <c:v>фев 23</c:v>
+                </c:pt>
+                <c:pt idx="2">
+                  <c:v>мар 23</c:v>
+                </c:pt>
+                <c:pt idx="3">
+                  <c:v>апр 23</c:v>
+                </c:pt>
+                <c:pt idx="4">
+                  <c:v>май 23</c:v>
+                </c:pt>
+                <c:pt idx="5">
+                  <c:v>июн 23</c:v>
+                </c:pt>
+                <c:pt idx="6">
+                  <c:v>июл 23</c:v>
+                </c:pt>
+                <c:pt idx="7">
+                  <c:v>авг 23</c:v>
+                </c:pt>
+                <c:pt idx="8">
+                  <c:v>сен 23</c:v>
+                </c:pt>
+                <c:pt idx="9">
+                  <c:v>окт 23</c:v>
+                </c:pt>
+                <c:pt idx="10">
+                  <c:v>ноя 23</c:v>
+                </c:pt>
+                <c:pt idx="11">
+                  <c:v>дек 23</c:v>
+                </c:pt>
+                <c:pt idx="12">
+                  <c:v>янв 24</c:v>
+                </c:pt>
+                <c:pt idx="13">
+                  <c:v>фев 24</c:v>
+                </c:pt>
+                <c:pt idx="14">
+                  <c:v>мар 24</c:v>
+                </c:pt>
+                <c:pt idx="15">
+                  <c:v>апр 24</c:v>
+                </c:pt>
+                <c:pt idx="16">
+                  <c:v>май 24</c:v>
+                </c:pt>
+                <c:pt idx="17">
+                  <c:v>июн 24</c:v>
+                </c:pt>
+                <c:pt idx="18">
+                  <c:v>июл 24</c:v>
+                </c:pt>
+                <c:pt idx="19">
+                  <c:v>авг 24</c:v>
+                </c:pt>
+                <c:pt idx="20">
+                  <c:v>сен 24</c:v>
+                </c:pt>
+                <c:pt idx="21">
+                  <c:v>окт 24</c:v>
+                </c:pt>
+                <c:pt idx="22">
+                  <c:v>ноя 24</c:v>
+                </c:pt>
+                <c:pt idx="23">
+                  <c:v>дек 24</c:v>
+                </c:pt>
+              </c:strCache>
+            </c:strRef>
           </c:cat>
           <c:val>
             <c:numRef>
@@ -2192,13 +2185,13 @@
                   <c:v>5.1</c:v>
                 </c:pt>
                 <c:pt idx="4">
-                  <c:v>5</c:v>
+                  <c:v>5.0</c:v>
                 </c:pt>
                 <c:pt idx="5">
-                  <c:v>5</c:v>
+                  <c:v>5.0</c:v>
                 </c:pt>
                 <c:pt idx="6">
-                  <c:v>5</c:v>
+                  <c:v>5.0</c:v>
                 </c:pt>
                 <c:pt idx="7">
                   <c:v>5.3</c:v>
@@ -2264,7 +2257,7 @@
               <c:strCache>
                 <c:ptCount val="1"/>
                 <c:pt idx="0">
-                  <c:v>Сибирь и Дальний Восток</c:v>
+                  <c:v>Сибирь, ДВ и Север</c:v>
                 </c:pt>
               </c:strCache>
             </c:strRef>
@@ -2301,86 +2294,84 @@
             <c:showLeaderLines val="0"/>
           </c:dLbls>
           <c:cat>
-            <c:multiLvlStrRef>
+            <c:strRef>
               <c:f>Sheet1!$A$2:$A$25</c:f>
-              <c:multiLvlStrCache>
+              <c:strCache>
                 <c:ptCount val="24"/>
-                <c:lvl>
-                  <c:pt idx="0">
-                    <c:v>янв 23</c:v>
-                  </c:pt>
-                  <c:pt idx="1">
-                    <c:v>фев 23</c:v>
-                  </c:pt>
-                  <c:pt idx="2">
-                    <c:v>мар 23</c:v>
-                  </c:pt>
-                  <c:pt idx="3">
-                    <c:v>апр 23</c:v>
-                  </c:pt>
-                  <c:pt idx="4">
-                    <c:v>май 23</c:v>
-                  </c:pt>
-                  <c:pt idx="5">
-                    <c:v>июн 23</c:v>
-                  </c:pt>
-                  <c:pt idx="6">
-                    <c:v>июл 23</c:v>
-                  </c:pt>
-                  <c:pt idx="7">
-                    <c:v>авг 23</c:v>
-                  </c:pt>
-                  <c:pt idx="8">
-                    <c:v>сен 23</c:v>
-                  </c:pt>
-                  <c:pt idx="9">
-                    <c:v>окт 23</c:v>
-                  </c:pt>
-                  <c:pt idx="10">
-                    <c:v>ноя 23</c:v>
-                  </c:pt>
-                  <c:pt idx="11">
-                    <c:v>дек 23</c:v>
-                  </c:pt>
-                  <c:pt idx="12">
-                    <c:v>янв 24</c:v>
-                  </c:pt>
-                  <c:pt idx="13">
-                    <c:v>фев 24</c:v>
-                  </c:pt>
-                  <c:pt idx="14">
-                    <c:v>мар 24</c:v>
-                  </c:pt>
-                  <c:pt idx="15">
-                    <c:v>апр 24</c:v>
-                  </c:pt>
-                  <c:pt idx="16">
-                    <c:v>май 24</c:v>
-                  </c:pt>
-                  <c:pt idx="17">
-                    <c:v>июн 24</c:v>
-                  </c:pt>
-                  <c:pt idx="18">
-                    <c:v>июл 24</c:v>
-                  </c:pt>
-                  <c:pt idx="19">
-                    <c:v>авг 24</c:v>
-                  </c:pt>
-                  <c:pt idx="20">
-                    <c:v>сен 24</c:v>
-                  </c:pt>
-                  <c:pt idx="21">
-                    <c:v>окт 24</c:v>
-                  </c:pt>
-                  <c:pt idx="22">
-                    <c:v>ноя 24</c:v>
-                  </c:pt>
-                  <c:pt idx="23">
-                    <c:v>дек 24</c:v>
-                  </c:pt>
-                </c:lvl>
-              </c:multiLvlStrCache>
-            </c:multiLvlStrRef>
+                <c:pt idx="0">
+                  <c:v>янв 23</c:v>
+                </c:pt>
+                <c:pt idx="1">
+                  <c:v>фев 23</c:v>
+                </c:pt>
+                <c:pt idx="2">
+                  <c:v>мар 23</c:v>
+                </c:pt>
+                <c:pt idx="3">
+                  <c:v>апр 23</c:v>
+                </c:pt>
+                <c:pt idx="4">
+                  <c:v>май 23</c:v>
+                </c:pt>
+                <c:pt idx="5">
+                  <c:v>июн 23</c:v>
+                </c:pt>
+                <c:pt idx="6">
+                  <c:v>июл 23</c:v>
+                </c:pt>
+                <c:pt idx="7">
+                  <c:v>авг 23</c:v>
+                </c:pt>
+                <c:pt idx="8">
+                  <c:v>сен 23</c:v>
+                </c:pt>
+                <c:pt idx="9">
+                  <c:v>окт 23</c:v>
+                </c:pt>
+                <c:pt idx="10">
+                  <c:v>ноя 23</c:v>
+                </c:pt>
+                <c:pt idx="11">
+                  <c:v>дек 23</c:v>
+                </c:pt>
+                <c:pt idx="12">
+                  <c:v>янв 24</c:v>
+                </c:pt>
+                <c:pt idx="13">
+                  <c:v>фев 24</c:v>
+                </c:pt>
+                <c:pt idx="14">
+                  <c:v>мар 24</c:v>
+                </c:pt>
+                <c:pt idx="15">
+                  <c:v>апр 24</c:v>
+                </c:pt>
+                <c:pt idx="16">
+                  <c:v>май 24</c:v>
+                </c:pt>
+                <c:pt idx="17">
+                  <c:v>июн 24</c:v>
+                </c:pt>
+                <c:pt idx="18">
+                  <c:v>июл 24</c:v>
+                </c:pt>
+                <c:pt idx="19">
+                  <c:v>авг 24</c:v>
+                </c:pt>
+                <c:pt idx="20">
+                  <c:v>сен 24</c:v>
+                </c:pt>
+                <c:pt idx="21">
+                  <c:v>окт 24</c:v>
+                </c:pt>
+                <c:pt idx="22">
+                  <c:v>ноя 24</c:v>
+                </c:pt>
+                <c:pt idx="23">
+                  <c:v>дек 24</c:v>
+                </c:pt>
+              </c:strCache>
+            </c:strRef>
           </c:cat>
           <c:val>
             <c:numRef>
@@ -2401,7 +2392,7 @@
                   <c:v>9.9</c:v>
                 </c:pt>
                 <c:pt idx="4">
-                  <c:v>10</c:v>
+                  <c:v>10.0</c:v>
                 </c:pt>
                 <c:pt idx="5">
                   <c:v>9.9</c:v>
@@ -2437,7 +2428,7 @@
                   <c:v>10.7</c:v>
                 </c:pt>
                 <c:pt idx="16">
-                  <c:v>11</c:v>
+                  <c:v>11.0</c:v>
                 </c:pt>
                 <c:pt idx="17">
                   <c:v>11.1</c:v>
@@ -2452,7 +2443,7 @@
                   <c:v>8.7</c:v>
                 </c:pt>
                 <c:pt idx="21">
-                  <c:v>11</c:v>
+                  <c:v>11.0</c:v>
                 </c:pt>
                 <c:pt idx="22">
                   <c:v>10.6</c:v>
@@ -2510,86 +2501,84 @@
             <c:showLeaderLines val="0"/>
           </c:dLbls>
           <c:cat>
-            <c:multiLvlStrRef>
+            <c:strRef>
               <c:f>Sheet1!$A$2:$A$25</c:f>
-              <c:multiLvlStrCache>
+              <c:strCache>
                 <c:ptCount val="24"/>
-                <c:lvl>
-                  <c:pt idx="0">
-                    <c:v>янв 23</c:v>
-                  </c:pt>
-                  <c:pt idx="1">
-                    <c:v>фев 23</c:v>
-                  </c:pt>
-                  <c:pt idx="2">
-                    <c:v>мар 23</c:v>
-                  </c:pt>
-                  <c:pt idx="3">
-                    <c:v>апр 23</c:v>
-                  </c:pt>
-                  <c:pt idx="4">
-                    <c:v>май 23</c:v>
-                  </c:pt>
-                  <c:pt idx="5">
-                    <c:v>июн 23</c:v>
-                  </c:pt>
-                  <c:pt idx="6">
-                    <c:v>июл 23</c:v>
-                  </c:pt>
-                  <c:pt idx="7">
-                    <c:v>авг 23</c:v>
-                  </c:pt>
-                  <c:pt idx="8">
-                    <c:v>сен 23</c:v>
-                  </c:pt>
-                  <c:pt idx="9">
-                    <c:v>окт 23</c:v>
-                  </c:pt>
-                  <c:pt idx="10">
-                    <c:v>ноя 23</c:v>
-                  </c:pt>
-                  <c:pt idx="11">
-                    <c:v>дек 23</c:v>
-                  </c:pt>
-                  <c:pt idx="12">
-                    <c:v>янв 24</c:v>
-                  </c:pt>
-                  <c:pt idx="13">
-                    <c:v>фев 24</c:v>
-                  </c:pt>
-                  <c:pt idx="14">
-                    <c:v>мар 24</c:v>
-                  </c:pt>
-                  <c:pt idx="15">
-                    <c:v>апр 24</c:v>
-                  </c:pt>
-                  <c:pt idx="16">
-                    <c:v>май 24</c:v>
-                  </c:pt>
-                  <c:pt idx="17">
-                    <c:v>июн 24</c:v>
-                  </c:pt>
-                  <c:pt idx="18">
-                    <c:v>июл 24</c:v>
-                  </c:pt>
-                  <c:pt idx="19">
-                    <c:v>авг 24</c:v>
-                  </c:pt>
-                  <c:pt idx="20">
-                    <c:v>сен 24</c:v>
-                  </c:pt>
-                  <c:pt idx="21">
-                    <c:v>окт 24</c:v>
-                  </c:pt>
-                  <c:pt idx="22">
-                    <c:v>ноя 24</c:v>
-                  </c:pt>
-                  <c:pt idx="23">
-                    <c:v>дек 24</c:v>
-                  </c:pt>
-                </c:lvl>
-              </c:multiLvlStrCache>
-            </c:multiLvlStrRef>
+                <c:pt idx="0">
+                  <c:v>янв 23</c:v>
+                </c:pt>
+                <c:pt idx="1">
+                  <c:v>фев 23</c:v>
+                </c:pt>
+                <c:pt idx="2">
+                  <c:v>мар 23</c:v>
+                </c:pt>
+                <c:pt idx="3">
+                  <c:v>апр 23</c:v>
+                </c:pt>
+                <c:pt idx="4">
+                  <c:v>май 23</c:v>
+                </c:pt>
+                <c:pt idx="5">
+                  <c:v>июн 23</c:v>
+                </c:pt>
+                <c:pt idx="6">
+                  <c:v>июл 23</c:v>
+                </c:pt>
+                <c:pt idx="7">
+                  <c:v>авг 23</c:v>
+                </c:pt>
+                <c:pt idx="8">
+                  <c:v>сен 23</c:v>
+                </c:pt>
+                <c:pt idx="9">
+                  <c:v>окт 23</c:v>
+                </c:pt>
+                <c:pt idx="10">
+                  <c:v>ноя 23</c:v>
+                </c:pt>
+                <c:pt idx="11">
+                  <c:v>дек 23</c:v>
+                </c:pt>
+                <c:pt idx="12">
+                  <c:v>янв 24</c:v>
+                </c:pt>
+                <c:pt idx="13">
+                  <c:v>фев 24</c:v>
+                </c:pt>
+                <c:pt idx="14">
+                  <c:v>мар 24</c:v>
+                </c:pt>
+                <c:pt idx="15">
+                  <c:v>апр 24</c:v>
+                </c:pt>
+                <c:pt idx="16">
+                  <c:v>май 24</c:v>
+                </c:pt>
+                <c:pt idx="17">
+                  <c:v>июн 24</c:v>
+                </c:pt>
+                <c:pt idx="18">
+                  <c:v>июл 24</c:v>
+                </c:pt>
+                <c:pt idx="19">
+                  <c:v>авг 24</c:v>
+                </c:pt>
+                <c:pt idx="20">
+                  <c:v>сен 24</c:v>
+                </c:pt>
+                <c:pt idx="21">
+                  <c:v>окт 24</c:v>
+                </c:pt>
+                <c:pt idx="22">
+                  <c:v>ноя 24</c:v>
+                </c:pt>
+                <c:pt idx="23">
+                  <c:v>дек 24</c:v>
+                </c:pt>
+              </c:strCache>
+            </c:strRef>
           </c:cat>
           <c:val>
             <c:numRef>
@@ -2625,7 +2614,7 @@
                   <c:v>27.3</c:v>
                 </c:pt>
                 <c:pt idx="9">
-                  <c:v>27</c:v>
+                  <c:v>27.0</c:v>
                 </c:pt>
                 <c:pt idx="10">
                   <c:v>27.5</c:v>
@@ -2655,7 +2644,7 @@
                   <c:v>25.8</c:v>
                 </c:pt>
                 <c:pt idx="19">
-                  <c:v>26</c:v>
+                  <c:v>26.0</c:v>
                 </c:pt>
                 <c:pt idx="20">
                   <c:v>25.7</c:v>
@@ -2682,7 +2671,7 @@
               <c:strCache>
                 <c:ptCount val="1"/>
                 <c:pt idx="0">
-                  <c:v>Сельская Сибирь</c:v>
+                  <c:v>Сельская Сибирь и Север</c:v>
                 </c:pt>
               </c:strCache>
             </c:strRef>
@@ -2719,86 +2708,84 @@
             <c:showLeaderLines val="0"/>
           </c:dLbls>
           <c:cat>
-            <c:multiLvlStrRef>
+            <c:strRef>
               <c:f>Sheet1!$A$2:$A$25</c:f>
-              <c:multiLvlStrCache>
+              <c:strCache>
                 <c:ptCount val="24"/>
-                <c:lvl>
-                  <c:pt idx="0">
-                    <c:v>янв 23</c:v>
-                  </c:pt>
-                  <c:pt idx="1">
-                    <c:v>фев 23</c:v>
-                  </c:pt>
-                  <c:pt idx="2">
-                    <c:v>мар 23</c:v>
-                  </c:pt>
-                  <c:pt idx="3">
-                    <c:v>апр 23</c:v>
-                  </c:pt>
-                  <c:pt idx="4">
-                    <c:v>май 23</c:v>
-                  </c:pt>
-                  <c:pt idx="5">
-                    <c:v>июн 23</c:v>
-                  </c:pt>
-                  <c:pt idx="6">
-                    <c:v>июл 23</c:v>
-                  </c:pt>
-                  <c:pt idx="7">
-                    <c:v>авг 23</c:v>
-                  </c:pt>
-                  <c:pt idx="8">
-                    <c:v>сен 23</c:v>
-                  </c:pt>
-                  <c:pt idx="9">
-                    <c:v>окт 23</c:v>
-                  </c:pt>
-                  <c:pt idx="10">
-                    <c:v>ноя 23</c:v>
-                  </c:pt>
-                  <c:pt idx="11">
-                    <c:v>дек 23</c:v>
-                  </c:pt>
-                  <c:pt idx="12">
-                    <c:v>янв 24</c:v>
-                  </c:pt>
-                  <c:pt idx="13">
-                    <c:v>фев 24</c:v>
-                  </c:pt>
-                  <c:pt idx="14">
-                    <c:v>мар 24</c:v>
-                  </c:pt>
-                  <c:pt idx="15">
-                    <c:v>апр 24</c:v>
-                  </c:pt>
-                  <c:pt idx="16">
-                    <c:v>май 24</c:v>
-                  </c:pt>
-                  <c:pt idx="17">
-                    <c:v>июн 24</c:v>
-                  </c:pt>
-                  <c:pt idx="18">
-                    <c:v>июл 24</c:v>
-                  </c:pt>
-                  <c:pt idx="19">
-                    <c:v>авг 24</c:v>
-                  </c:pt>
-                  <c:pt idx="20">
-                    <c:v>сен 24</c:v>
-                  </c:pt>
-                  <c:pt idx="21">
-                    <c:v>окт 24</c:v>
-                  </c:pt>
-                  <c:pt idx="22">
-                    <c:v>ноя 24</c:v>
-                  </c:pt>
-                  <c:pt idx="23">
-                    <c:v>дек 24</c:v>
-                  </c:pt>
-                </c:lvl>
-              </c:multiLvlStrCache>
-            </c:multiLvlStrRef>
+                <c:pt idx="0">
+                  <c:v>янв 23</c:v>
+                </c:pt>
+                <c:pt idx="1">
+                  <c:v>фев 23</c:v>
+                </c:pt>
+                <c:pt idx="2">
+                  <c:v>мар 23</c:v>
+                </c:pt>
+                <c:pt idx="3">
+                  <c:v>апр 23</c:v>
+                </c:pt>
+                <c:pt idx="4">
+                  <c:v>май 23</c:v>
+                </c:pt>
+                <c:pt idx="5">
+                  <c:v>июн 23</c:v>
+                </c:pt>
+                <c:pt idx="6">
+                  <c:v>июл 23</c:v>
+                </c:pt>
+                <c:pt idx="7">
+                  <c:v>авг 23</c:v>
+                </c:pt>
+                <c:pt idx="8">
+                  <c:v>сен 23</c:v>
+                </c:pt>
+                <c:pt idx="9">
+                  <c:v>окт 23</c:v>
+                </c:pt>
+                <c:pt idx="10">
+                  <c:v>ноя 23</c:v>
+                </c:pt>
+                <c:pt idx="11">
+                  <c:v>дек 23</c:v>
+                </c:pt>
+                <c:pt idx="12">
+                  <c:v>янв 24</c:v>
+                </c:pt>
+                <c:pt idx="13">
+                  <c:v>фев 24</c:v>
+                </c:pt>
+                <c:pt idx="14">
+                  <c:v>мар 24</c:v>
+                </c:pt>
+                <c:pt idx="15">
+                  <c:v>апр 24</c:v>
+                </c:pt>
+                <c:pt idx="16">
+                  <c:v>май 24</c:v>
+                </c:pt>
+                <c:pt idx="17">
+                  <c:v>июн 24</c:v>
+                </c:pt>
+                <c:pt idx="18">
+                  <c:v>июл 24</c:v>
+                </c:pt>
+                <c:pt idx="19">
+                  <c:v>авг 24</c:v>
+                </c:pt>
+                <c:pt idx="20">
+                  <c:v>сен 24</c:v>
+                </c:pt>
+                <c:pt idx="21">
+                  <c:v>окт 24</c:v>
+                </c:pt>
+                <c:pt idx="22">
+                  <c:v>ноя 24</c:v>
+                </c:pt>
+                <c:pt idx="23">
+                  <c:v>дек 24</c:v>
+                </c:pt>
+              </c:strCache>
+            </c:strRef>
           </c:cat>
           <c:val>
             <c:numRef>
@@ -2846,7 +2833,7 @@
                   <c:v>3.7</c:v>
                 </c:pt>
                 <c:pt idx="13">
-                  <c:v>3</c:v>
+                  <c:v>3.0</c:v>
                 </c:pt>
                 <c:pt idx="14">
                   <c:v>3.1</c:v>
@@ -2928,86 +2915,84 @@
             <c:showLeaderLines val="0"/>
           </c:dLbls>
           <c:cat>
-            <c:multiLvlStrRef>
+            <c:strRef>
               <c:f>Sheet1!$A$2:$A$25</c:f>
-              <c:multiLvlStrCache>
+              <c:strCache>
                 <c:ptCount val="24"/>
-                <c:lvl>
-                  <c:pt idx="0">
-                    <c:v>янв 23</c:v>
-                  </c:pt>
-                  <c:pt idx="1">
-                    <c:v>фев 23</c:v>
-                  </c:pt>
-                  <c:pt idx="2">
-                    <c:v>мар 23</c:v>
-                  </c:pt>
-                  <c:pt idx="3">
-                    <c:v>апр 23</c:v>
-                  </c:pt>
-                  <c:pt idx="4">
-                    <c:v>май 23</c:v>
-                  </c:pt>
-                  <c:pt idx="5">
-                    <c:v>июн 23</c:v>
-                  </c:pt>
-                  <c:pt idx="6">
-                    <c:v>июл 23</c:v>
-                  </c:pt>
-                  <c:pt idx="7">
-                    <c:v>авг 23</c:v>
-                  </c:pt>
-                  <c:pt idx="8">
-                    <c:v>сен 23</c:v>
-                  </c:pt>
-                  <c:pt idx="9">
-                    <c:v>окт 23</c:v>
-                  </c:pt>
-                  <c:pt idx="10">
-                    <c:v>ноя 23</c:v>
-                  </c:pt>
-                  <c:pt idx="11">
-                    <c:v>дек 23</c:v>
-                  </c:pt>
-                  <c:pt idx="12">
-                    <c:v>янв 24</c:v>
-                  </c:pt>
-                  <c:pt idx="13">
-                    <c:v>фев 24</c:v>
-                  </c:pt>
-                  <c:pt idx="14">
-                    <c:v>мар 24</c:v>
-                  </c:pt>
-                  <c:pt idx="15">
-                    <c:v>апр 24</c:v>
-                  </c:pt>
-                  <c:pt idx="16">
-                    <c:v>май 24</c:v>
-                  </c:pt>
-                  <c:pt idx="17">
-                    <c:v>июн 24</c:v>
-                  </c:pt>
-                  <c:pt idx="18">
-                    <c:v>июл 24</c:v>
-                  </c:pt>
-                  <c:pt idx="19">
-                    <c:v>авг 24</c:v>
-                  </c:pt>
-                  <c:pt idx="20">
-                    <c:v>сен 24</c:v>
-                  </c:pt>
-                  <c:pt idx="21">
-                    <c:v>окт 24</c:v>
-                  </c:pt>
-                  <c:pt idx="22">
-                    <c:v>ноя 24</c:v>
-                  </c:pt>
-                  <c:pt idx="23">
-                    <c:v>дек 24</c:v>
-                  </c:pt>
-                </c:lvl>
-              </c:multiLvlStrCache>
-            </c:multiLvlStrRef>
+                <c:pt idx="0">
+                  <c:v>янв 23</c:v>
+                </c:pt>
+                <c:pt idx="1">
+                  <c:v>фев 23</c:v>
+                </c:pt>
+                <c:pt idx="2">
+                  <c:v>мар 23</c:v>
+                </c:pt>
+                <c:pt idx="3">
+                  <c:v>апр 23</c:v>
+                </c:pt>
+                <c:pt idx="4">
+                  <c:v>май 23</c:v>
+                </c:pt>
+                <c:pt idx="5">
+                  <c:v>июн 23</c:v>
+                </c:pt>
+                <c:pt idx="6">
+                  <c:v>июл 23</c:v>
+                </c:pt>
+                <c:pt idx="7">
+                  <c:v>авг 23</c:v>
+                </c:pt>
+                <c:pt idx="8">
+                  <c:v>сен 23</c:v>
+                </c:pt>
+                <c:pt idx="9">
+                  <c:v>окт 23</c:v>
+                </c:pt>
+                <c:pt idx="10">
+                  <c:v>ноя 23</c:v>
+                </c:pt>
+                <c:pt idx="11">
+                  <c:v>дек 23</c:v>
+                </c:pt>
+                <c:pt idx="12">
+                  <c:v>янв 24</c:v>
+                </c:pt>
+                <c:pt idx="13">
+                  <c:v>фев 24</c:v>
+                </c:pt>
+                <c:pt idx="14">
+                  <c:v>мар 24</c:v>
+                </c:pt>
+                <c:pt idx="15">
+                  <c:v>апр 24</c:v>
+                </c:pt>
+                <c:pt idx="16">
+                  <c:v>май 24</c:v>
+                </c:pt>
+                <c:pt idx="17">
+                  <c:v>июн 24</c:v>
+                </c:pt>
+                <c:pt idx="18">
+                  <c:v>июл 24</c:v>
+                </c:pt>
+                <c:pt idx="19">
+                  <c:v>авг 24</c:v>
+                </c:pt>
+                <c:pt idx="20">
+                  <c:v>сен 24</c:v>
+                </c:pt>
+                <c:pt idx="21">
+                  <c:v>окт 24</c:v>
+                </c:pt>
+                <c:pt idx="22">
+                  <c:v>ноя 24</c:v>
+                </c:pt>
+                <c:pt idx="23">
+                  <c:v>дек 24</c:v>
+                </c:pt>
+              </c:strCache>
+            </c:strRef>
           </c:cat>
           <c:val>
             <c:numRef>
@@ -3055,7 +3040,7 @@
                   <c:v>45.8</c:v>
                 </c:pt>
                 <c:pt idx="13">
-                  <c:v>46</c:v>
+                  <c:v>46.0</c:v>
                 </c:pt>
                 <c:pt idx="14">
                   <c:v>45.5</c:v>
@@ -3313,38 +3298,36 @@
             <c:showLeaderLines val="0"/>
           </c:dLbls>
           <c:cat>
-            <c:multiLvlStrRef>
+            <c:strRef>
               <c:f>Sheet1!$A$2:$A$9</c:f>
-              <c:multiLvlStrCache>
+              <c:strCache>
                 <c:ptCount val="8"/>
-                <c:lvl>
-                  <c:pt idx="0">
-                    <c:v>Столичные пригороды</c:v>
-                  </c:pt>
-                  <c:pt idx="1">
-                    <c:v>Удалённый Северо-Восток</c:v>
-                  </c:pt>
-                  <c:pt idx="2">
-                    <c:v>Ресурсные центры</c:v>
-                  </c:pt>
-                  <c:pt idx="3">
-                    <c:v>Крупные города</c:v>
-                  </c:pt>
-                  <c:pt idx="4">
-                    <c:v>Сибирь и Дальний Восток</c:v>
-                  </c:pt>
-                  <c:pt idx="5">
-                    <c:v>Индустриальные города</c:v>
-                  </c:pt>
-                  <c:pt idx="6">
-                    <c:v>Сельская Сибирь</c:v>
-                  </c:pt>
-                  <c:pt idx="7">
-                    <c:v>Аграрная глубинка</c:v>
-                  </c:pt>
-                </c:lvl>
-              </c:multiLvlStrCache>
-            </c:multiLvlStrRef>
+                <c:pt idx="0">
+                  <c:v>Столичные пригороды</c:v>
+                </c:pt>
+                <c:pt idx="1">
+                  <c:v>Удалённый Северо-Восток</c:v>
+                </c:pt>
+                <c:pt idx="2">
+                  <c:v>Ресурсные центры</c:v>
+                </c:pt>
+                <c:pt idx="3">
+                  <c:v>Крупные города</c:v>
+                </c:pt>
+                <c:pt idx="4">
+                  <c:v>Сибирь, ДВ и Север</c:v>
+                </c:pt>
+                <c:pt idx="5">
+                  <c:v>Индустриальные города</c:v>
+                </c:pt>
+                <c:pt idx="6">
+                  <c:v>Сельская Сибирь и Север</c:v>
+                </c:pt>
+                <c:pt idx="7">
+                  <c:v>Аграрная глубинка</c:v>
+                </c:pt>
+              </c:strCache>
+            </c:strRef>
           </c:cat>
           <c:val>
             <c:numRef>
@@ -3426,38 +3409,36 @@
             <c:showLeaderLines val="0"/>
           </c:dLbls>
           <c:cat>
-            <c:multiLvlStrRef>
+            <c:strRef>
               <c:f>Sheet1!$A$2:$A$9</c:f>
-              <c:multiLvlStrCache>
+              <c:strCache>
                 <c:ptCount val="8"/>
-                <c:lvl>
-                  <c:pt idx="0">
-                    <c:v>Столичные пригороды</c:v>
-                  </c:pt>
-                  <c:pt idx="1">
-                    <c:v>Удалённый Северо-Восток</c:v>
-                  </c:pt>
-                  <c:pt idx="2">
-                    <c:v>Ресурсные центры</c:v>
-                  </c:pt>
-                  <c:pt idx="3">
-                    <c:v>Крупные города</c:v>
-                  </c:pt>
-                  <c:pt idx="4">
-                    <c:v>Сибирь и Дальний Восток</c:v>
-                  </c:pt>
-                  <c:pt idx="5">
-                    <c:v>Индустриальные города</c:v>
-                  </c:pt>
-                  <c:pt idx="6">
-                    <c:v>Сельская Сибирь</c:v>
-                  </c:pt>
-                  <c:pt idx="7">
-                    <c:v>Аграрная глубинка</c:v>
-                  </c:pt>
-                </c:lvl>
-              </c:multiLvlStrCache>
-            </c:multiLvlStrRef>
+                <c:pt idx="0">
+                  <c:v>Столичные пригороды</c:v>
+                </c:pt>
+                <c:pt idx="1">
+                  <c:v>Удалённый Северо-Восток</c:v>
+                </c:pt>
+                <c:pt idx="2">
+                  <c:v>Ресурсные центры</c:v>
+                </c:pt>
+                <c:pt idx="3">
+                  <c:v>Крупные города</c:v>
+                </c:pt>
+                <c:pt idx="4">
+                  <c:v>Сибирь, ДВ и Север</c:v>
+                </c:pt>
+                <c:pt idx="5">
+                  <c:v>Индустриальные города</c:v>
+                </c:pt>
+                <c:pt idx="6">
+                  <c:v>Сельская Сибирь и Север</c:v>
+                </c:pt>
+                <c:pt idx="7">
+                  <c:v>Аграрная глубинка</c:v>
+                </c:pt>
+              </c:strCache>
+            </c:strRef>
           </c:cat>
           <c:val>
             <c:numRef>
@@ -3705,32 +3686,30 @@
             <c:showLeaderLines val="0"/>
           </c:dLbls>
           <c:cat>
-            <c:multiLvlStrRef>
+            <c:strRef>
               <c:f>Sheet1!$A$2:$A$7</c:f>
-              <c:multiLvlStrCache>
+              <c:strCache>
                 <c:ptCount val="6"/>
-                <c:lvl>
-                  <c:pt idx="0">
-                    <c:v>без блока «Сезонность»</c:v>
-                  </c:pt>
-                  <c:pt idx="1">
-                    <c:v>без блока «Структура трат»</c:v>
-                  </c:pt>
-                  <c:pt idx="2">
-                    <c:v>без блока «География»</c:v>
-                  </c:pt>
-                  <c:pt idx="3">
-                    <c:v>без блока «Отрасли»</c:v>
-                  </c:pt>
-                  <c:pt idx="4">
-                    <c:v>без блока «Уровень трат»</c:v>
-                  </c:pt>
-                  <c:pt idx="5">
-                    <c:v>без блока «Рынок труда»</c:v>
-                  </c:pt>
-                </c:lvl>
-              </c:multiLvlStrCache>
-            </c:multiLvlStrRef>
+                <c:pt idx="0">
+                  <c:v>без блока «Сезонность»</c:v>
+                </c:pt>
+                <c:pt idx="1">
+                  <c:v>без блока «Структура трат»</c:v>
+                </c:pt>
+                <c:pt idx="2">
+                  <c:v>без блока «География»</c:v>
+                </c:pt>
+                <c:pt idx="3">
+                  <c:v>без блока «Отрасли»</c:v>
+                </c:pt>
+                <c:pt idx="4">
+                  <c:v>без блока «Уровень трат»</c:v>
+                </c:pt>
+                <c:pt idx="5">
+                  <c:v>без блока «Рынок труда»</c:v>
+                </c:pt>
+              </c:strCache>
+            </c:strRef>
           </c:cat>
           <c:val>
             <c:numRef>
@@ -3754,7 +3733,7 @@
                   <c:v>0.685</c:v>
                 </c:pt>
                 <c:pt idx="5">
-                  <c:v>0.875</c:v>
+                  <c:v>0.8749</c:v>
                 </c:pt>
               </c:numCache>
             </c:numRef>
@@ -6636,7 +6615,7 @@
       </p:pic>
       <p:pic>
         <p:nvPicPr>
-          <p:cNvPr id="8" name="Фишка Сибирь и Дальний Восток" descr="Сибирь и Дальний Восток">    </p:cNvPr>
+          <p:cNvPr id="8" name="Фишка Сибирь, ДВ и Север" descr="Сибирь и Дальний Восток">    </p:cNvPr>
           <p:cNvPicPr>
             <a:picLocks noChangeAspect="1"/>
           </p:cNvPicPr>
@@ -6684,7 +6663,7 @@
       </p:pic>
       <p:pic>
         <p:nvPicPr>
-          <p:cNvPr id="10" name="Фишка Сельская Сибирь" descr="Сельская Сибирь">    </p:cNvPr>
+          <p:cNvPr id="10" name="Фишка Сельская Сибирь и Север" descr="Сельская Сибирь">    </p:cNvPr>
           <p:cNvPicPr>
             <a:picLocks noChangeAspect="1"/>
           </p:cNvPicPr>
@@ -7023,6 +7002,10 @@
             <a:prstDash val="solid"/>
           </a:ln>
         </p:spPr>
+        <p:txBody>
+          <a:bodyPr/>
+          <a:p/>
+        </p:txBody>
       </p:sp>
       <p:pic>
         <p:nvPicPr>
@@ -7182,6 +7165,10 @@
             <a:prstDash val="solid"/>
           </a:ln>
         </p:spPr>
+        <p:txBody>
+          <a:bodyPr/>
+          <a:p/>
+        </p:txBody>
       </p:sp>
       <p:pic>
         <p:nvPicPr>
@@ -7341,6 +7328,10 @@
             <a:prstDash val="solid"/>
           </a:ln>
         </p:spPr>
+        <p:txBody>
+          <a:bodyPr/>
+          <a:p/>
+        </p:txBody>
       </p:sp>
       <p:pic>
         <p:nvPicPr>
@@ -7500,6 +7491,10 @@
             <a:prstDash val="solid"/>
           </a:ln>
         </p:spPr>
+        <p:txBody>
+          <a:bodyPr/>
+          <a:p/>
+        </p:txBody>
       </p:sp>
       <p:pic>
         <p:nvPicPr>
@@ -7767,6 +7762,10 @@
             <a:prstDash val="solid"/>
           </a:ln>
         </p:spPr>
+        <p:txBody>
+          <a:bodyPr/>
+          <a:p/>
+        </p:txBody>
       </p:sp>
       <p:pic>
         <p:nvPicPr>
@@ -7822,7 +7821,7 @@
                   <a:srgbClr val="1F2328"/>
                 </a:solidFill>
               </a:rPr>
-              <a:t>Города и районы Сибири и Дальнего Востока</a:t>
+              <a:t>Города и районы Сибири, ДВ и Севера</a:t>
             </a:r>
             <a:endParaRPr lang="en-US" sz="1600" dirty="0"/>
           </a:p>
@@ -7926,6 +7925,10 @@
             <a:prstDash val="solid"/>
           </a:ln>
         </p:spPr>
+        <p:txBody>
+          <a:bodyPr/>
+          <a:p/>
+        </p:txBody>
       </p:sp>
       <p:pic>
         <p:nvPicPr>
@@ -8085,6 +8088,10 @@
             <a:prstDash val="solid"/>
           </a:ln>
         </p:spPr>
+        <p:txBody>
+          <a:bodyPr/>
+          <a:p/>
+        </p:txBody>
       </p:sp>
       <p:pic>
         <p:nvPicPr>
@@ -8140,7 +8147,7 @@
                   <a:srgbClr val="1F2328"/>
                 </a:solidFill>
               </a:rPr>
-              <a:t>Сельская периферия Сибири</a:t>
+              <a:t>Сельская периферия Сибири и Севера</a:t>
             </a:r>
             <a:endParaRPr lang="en-US" sz="1600" dirty="0"/>
           </a:p>
@@ -8244,6 +8251,10 @@
             <a:prstDash val="solid"/>
           </a:ln>
         </p:spPr>
+        <p:txBody>
+          <a:bodyPr/>
+          <a:p/>
+        </p:txBody>
       </p:sp>
       <p:pic>
         <p:nvPicPr>
@@ -8432,6 +8443,974 @@
 
 <file path=ppt/slides/slide13.xml><?xml version="1.0" encoding="utf-8"?>
 <p:sld xmlns:a="http://schemas.openxmlformats.org/drawingml/2006/main" xmlns:r="http://schemas.openxmlformats.org/officeDocument/2006/relationships" xmlns:p="http://schemas.openxmlformats.org/presentationml/2006/main">
+  <p:cSld name="Slide 10">
+    <p:spTree>
+      <p:nvGrpSpPr>
+        <p:cNvPr id="1" name=""/>
+        <p:cNvGrpSpPr/>
+        <p:nvPr/>
+      </p:nvGrpSpPr>
+      <p:grpSpPr>
+        <a:xfrm>
+          <a:off x="0" y="0"/>
+          <a:ext cx="0" cy="0"/>
+          <a:chOff x="0" y="0"/>
+          <a:chExt cx="0" cy="0"/>
+        </a:xfrm>
+      </p:grpSpPr>
+      <p:sp>
+        <p:nvSpPr>
+          <p:cNvPr id="2" name="Text 0"/>
+          <p:cNvSpPr/>
+          <p:nvPr>
+            <p:ph idx="100" type="title" hasCustomPrompt="1"/>
+          </p:nvPr>
+        </p:nvSpPr>
+        <p:spPr>
+          <a:xfrm>
+            <a:off x="548640" y="320040"/>
+            <a:ext cx="11064240" cy="777240"/>
+          </a:xfrm>
+          <a:prstGeom prst="rect">
+            <a:avLst/>
+          </a:prstGeom>
+          <a:noFill/>
+          <a:ln/>
+        </p:spPr>
+        <p:txBody>
+          <a:bodyPr wrap="square" lIns="0" tIns="0" rIns="0" bIns="0" rtlCol="0" anchor="ctr"/>
+          <a:lstStyle/>
+          <a:p>
+            <a:pPr algn="l" indent="0" marL="0">
+              <a:buNone/>
+            </a:pPr>
+            <a:r>
+              <a:rPr lang="en-US" sz="3000" b="1" dirty="0">
+                <a:solidFill>
+                  <a:schemeClr val="tx1"/>
+                </a:solidFill>
+              </a:rPr>
+              <a:t>Москва и Петербург: пять типов районов</a:t>
+            </a:r>
+            <a:endParaRPr lang="en-US" sz="3000" dirty="0"/>
+          </a:p>
+        </p:txBody>
+      </p:sp>
+      <p:sp>
+        <p:nvSpPr>
+          <p:cNvPr id="4" name="Text 1"/>
+          <p:cNvSpPr txBox="1"/>
+          <p:nvPr/>
+        </p:nvSpPr>
+        <p:spPr>
+          <a:xfrm>
+            <a:off x="548640" y="5806440"/>
+            <a:ext cx="11064240" cy="548640"/>
+          </a:xfrm>
+          <a:prstGeom prst="rect">
+            <a:avLst/>
+          </a:prstGeom>
+          <a:noFill/>
+          <a:ln/>
+        </p:spPr>
+        <p:txBody>
+          <a:bodyPr wrap="square" lIns="0" tIns="0" rIns="0" bIns="0" rtlCol="0" anchor="t"/>
+          <a:lstStyle/>
+          <a:p>
+            <a:pPr indent="0" marL="0">
+              <a:buNone/>
+            </a:pPr>
+            <a:r>
+              <a:rPr lang="en-US" sz="1350" dirty="0">
+                <a:solidFill>
+                  <a:srgbClr val="616975"/>
+                </a:solidFill>
+              </a:rPr>
+              <a:t>243 внутригородские территории типизированы отдельно и только по тратам: данных Росстата по районам нет. Москва и Петербург перемешаны внутри типов — тип района задаёт его положение (центр, срединное кольцо, спальный район, окраина), а не город.</a:t>
+            </a:r>
+            <a:endParaRPr lang="en-US" sz="1350" dirty="0"/>
+          </a:p>
+        </p:txBody>
+      </p:sp>
+      <p:sp>
+        <p:nvSpPr>
+          <p:cNvPr id="25" name="Slide Number Placeholder 0"/>
+          <p:cNvSpPr>
+            <a:spLocks noGrp="1"/>
+          </p:cNvSpPr>
+          <p:nvPr>
+            <p:ph type="sldNum" sz="quarter" idx="4294967295"/>
+          </p:nvPr>
+        </p:nvSpPr>
+        <p:spPr>
+          <a:xfrm>
+            <a:off x="11155680" y="6400800"/>
+            <a:ext cx="457200" cy="274320"/>
+          </a:xfrm>
+          <a:prstGeom prst="rect">
+            <a:avLst/>
+          </a:prstGeom>
+          <a:extLst>
+            <a:ext uri="{C572A759-6A51-4108-AA02-DFA0A04FC94B}">
+              <ma14:wrappingTextBoxFlag xmlns:ma14="http://schemas.microsoft.com/office/mac/drawingml/2011/main" val="0"/>
+            </a:ext>
+          </a:extLst>
+        </p:spPr>
+        <p:txBody>
+          <a:bodyPr/>
+          <a:lstStyle>
+            <a:lvl1pPr>
+              <a:defRPr sz="1000">
+                <a:solidFill>
+                  <a:srgbClr val="616975"/>
+                </a:solidFill>
+              </a:defRPr>
+            </a:lvl1pPr>
+          </a:lstStyle>
+          <a:p>
+            <a:pPr algn="r"/>
+            <a:fld id="{F7021451-1387-4CA6-816F-3879F97B5CBC}" type="slidenum">
+              <a:rPr b="0" lang="en-US"/>
+              <a:t>10</a:t>
+            </a:fld>
+            <a:endParaRPr lang="en-US"/>
+          </a:p>
+        </p:txBody>
+      </p:sp>
+      <p:sp>
+        <p:nvSpPr>
+          <p:cNvPr id="26" name="Подпись Москва"/>
+          <p:cNvSpPr txBox="1"/>
+          <p:nvPr/>
+        </p:nvSpPr>
+        <p:spPr>
+          <a:xfrm>
+            <a:off x="548640" y="1234440"/>
+            <a:ext cx="3108960" cy="292608"/>
+          </a:xfrm>
+          <a:prstGeom prst="rect">
+            <a:avLst/>
+          </a:prstGeom>
+          <a:noFill/>
+        </p:spPr>
+        <p:txBody>
+          <a:bodyPr wrap="square" lIns="0" rIns="0" tIns="0" bIns="0">
+            <a:spAutoFit/>
+          </a:bodyPr>
+          <a:lstStyle/>
+          <a:p>
+            <a:r>
+              <a:rPr sz="1400" b="1">
+                <a:solidFill>
+                  <a:srgbClr val="1F2328"/>
+                </a:solidFill>
+              </a:rPr>
+              <a:t>Москва · 144 района</a:t>
+            </a:r>
+          </a:p>
+        </p:txBody>
+      </p:sp>
+      <p:sp>
+        <p:nvSpPr>
+          <p:cNvPr id="27" name="Подпись Петербург"/>
+          <p:cNvSpPr txBox="1"/>
+          <p:nvPr/>
+        </p:nvSpPr>
+        <p:spPr>
+          <a:xfrm>
+            <a:off x="3840480" y="1234440"/>
+            <a:ext cx="2807208" cy="292608"/>
+          </a:xfrm>
+          <a:prstGeom prst="rect">
+            <a:avLst/>
+          </a:prstGeom>
+          <a:noFill/>
+        </p:spPr>
+        <p:txBody>
+          <a:bodyPr wrap="square" lIns="0" rIns="0" tIns="0" bIns="0">
+            <a:spAutoFit/>
+          </a:bodyPr>
+          <a:lstStyle/>
+          <a:p>
+            <a:r>
+              <a:rPr sz="1400" b="1">
+                <a:solidFill>
+                  <a:srgbClr val="1F2328"/>
+                </a:solidFill>
+              </a:rPr>
+              <a:t>Санкт-Петербург · 99 районов</a:t>
+            </a:r>
+          </a:p>
+        </p:txBody>
+      </p:sp>
+      <p:pic>
+        <p:nvPicPr>
+          <p:cNvPr id="28" name="Карта районов Москвы" descr="msk.png"/>
+          <p:cNvPicPr>
+            <a:picLocks noChangeAspect="1"/>
+          </p:cNvPicPr>
+          <p:nvPr/>
+        </p:nvPicPr>
+        <p:blipFill>
+          <a:blip r:embed="rId3"/>
+          <a:stretch>
+            <a:fillRect/>
+          </a:stretch>
+        </p:blipFill>
+        <p:spPr>
+          <a:xfrm>
+            <a:off x="548640" y="1645920"/>
+            <a:ext cx="3111731" cy="3657600"/>
+          </a:xfrm>
+          <a:prstGeom prst="rect">
+            <a:avLst/>
+          </a:prstGeom>
+        </p:spPr>
+      </p:pic>
+      <p:pic>
+        <p:nvPicPr>
+          <p:cNvPr id="29" name="Карта районов Петербурга" descr="spb.png"/>
+          <p:cNvPicPr>
+            <a:picLocks noChangeAspect="1"/>
+          </p:cNvPicPr>
+          <p:nvPr/>
+        </p:nvPicPr>
+        <p:blipFill>
+          <a:blip r:embed="rId4"/>
+          <a:stretch>
+            <a:fillRect/>
+          </a:stretch>
+        </p:blipFill>
+        <p:spPr>
+          <a:xfrm>
+            <a:off x="3840480" y="1645920"/>
+            <a:ext cx="2808593" cy="2926080"/>
+          </a:xfrm>
+          <a:prstGeom prst="rect">
+            <a:avLst/>
+          </a:prstGeom>
+        </p:spPr>
+      </p:pic>
+      <p:sp>
+        <p:nvSpPr>
+          <p:cNvPr id="30" name="Цвет типа 1"/>
+          <p:cNvSpPr/>
+          <p:nvPr/>
+        </p:nvSpPr>
+        <p:spPr>
+          <a:xfrm>
+            <a:off x="6949440" y="1271016"/>
+            <a:ext cx="237744" cy="237744"/>
+          </a:xfrm>
+          <a:prstGeom prst="roundRect">
+            <a:avLst/>
+          </a:prstGeom>
+          <a:solidFill>
+            <a:srgbClr val="6B0D38"/>
+          </a:solidFill>
+          <a:ln>
+            <a:noFill/>
+          </a:ln>
+        </p:spPr>
+        <p:style>
+          <a:lnRef idx="1">
+            <a:schemeClr val="accent1"/>
+          </a:lnRef>
+          <a:fillRef idx="3">
+            <a:schemeClr val="accent1"/>
+          </a:fillRef>
+          <a:effectRef idx="2">
+            <a:schemeClr val="accent1"/>
+          </a:effectRef>
+          <a:fontRef idx="minor">
+            <a:schemeClr val="lt1"/>
+          </a:fontRef>
+        </p:style>
+        <p:txBody>
+          <a:bodyPr rtlCol="0" anchor="ctr"/>
+          <a:lstStyle/>
+          <a:p>
+            <a:pPr algn="ctr"/>
+          </a:p>
+        </p:txBody>
+      </p:sp>
+      <p:sp>
+        <p:nvSpPr>
+          <p:cNvPr id="31" name="Тип района 1"/>
+          <p:cNvSpPr txBox="1"/>
+          <p:nvPr/>
+        </p:nvSpPr>
+        <p:spPr>
+          <a:xfrm>
+            <a:off x="7333488" y="1234440"/>
+            <a:ext cx="4279392" cy="292608"/>
+          </a:xfrm>
+          <a:prstGeom prst="rect">
+            <a:avLst/>
+          </a:prstGeom>
+          <a:noFill/>
+        </p:spPr>
+        <p:txBody>
+          <a:bodyPr wrap="square" lIns="0" rIns="0" tIns="0" bIns="0">
+            <a:spAutoFit/>
+          </a:bodyPr>
+          <a:lstStyle/>
+          <a:p>
+            <a:r>
+              <a:rPr sz="1450" b="1">
+                <a:solidFill>
+                  <a:srgbClr val="1F2328"/>
+                </a:solidFill>
+              </a:rPr>
+              <a:t>Престижный центр и запад Москвы</a:t>
+            </a:r>
+          </a:p>
+        </p:txBody>
+      </p:sp>
+      <p:sp>
+        <p:nvSpPr>
+          <p:cNvPr id="32" name="TextBox 31"/>
+          <p:cNvSpPr txBox="1"/>
+          <p:nvPr/>
+        </p:nvSpPr>
+        <p:spPr>
+          <a:xfrm>
+            <a:off x="7333488" y="1545336"/>
+            <a:ext cx="4279392" cy="237744"/>
+          </a:xfrm>
+          <a:prstGeom prst="rect">
+            <a:avLst/>
+          </a:prstGeom>
+          <a:noFill/>
+        </p:spPr>
+        <p:txBody>
+          <a:bodyPr wrap="square" lIns="0" rIns="0" tIns="0" bIns="0">
+            <a:spAutoFit/>
+          </a:bodyPr>
+          <a:lstStyle/>
+          <a:p>
+            <a:r>
+              <a:rPr sz="1200" b="0">
+                <a:solidFill>
+                  <a:srgbClr val="616975"/>
+                </a:solidFill>
+              </a:rPr>
+              <a:t>35 районов: 33 в Москве, 2 в Петербурге</a:t>
+            </a:r>
+          </a:p>
+        </p:txBody>
+      </p:sp>
+      <p:sp>
+        <p:nvSpPr>
+          <p:cNvPr id="33" name="TextBox 32"/>
+          <p:cNvSpPr txBox="1"/>
+          <p:nvPr/>
+        </p:nvSpPr>
+        <p:spPr>
+          <a:xfrm>
+            <a:off x="7333488" y="1783080"/>
+            <a:ext cx="4279392" cy="237744"/>
+          </a:xfrm>
+          <a:prstGeom prst="rect">
+            <a:avLst/>
+          </a:prstGeom>
+          <a:noFill/>
+        </p:spPr>
+        <p:txBody>
+          <a:bodyPr wrap="square" lIns="0" rIns="0" tIns="0" bIns="0">
+            <a:spAutoFit/>
+          </a:bodyPr>
+          <a:lstStyle/>
+          <a:p>
+            <a:r>
+              <a:rPr sz="1200" b="0">
+                <a:solidFill>
+                  <a:srgbClr val="616975"/>
+                </a:solidFill>
+              </a:rPr>
+              <a:t>траты 59 310 ₽ · продукты 28% · общепит 9,0%</a:t>
+            </a:r>
+          </a:p>
+        </p:txBody>
+      </p:sp>
+      <p:sp>
+        <p:nvSpPr>
+          <p:cNvPr id="34" name="Цвет типа 2"/>
+          <p:cNvSpPr/>
+          <p:nvPr/>
+        </p:nvSpPr>
+        <p:spPr>
+          <a:xfrm>
+            <a:off x="6949440" y="2139696"/>
+            <a:ext cx="237744" cy="237744"/>
+          </a:xfrm>
+          <a:prstGeom prst="roundRect">
+            <a:avLst/>
+          </a:prstGeom>
+          <a:solidFill>
+            <a:srgbClr val="A12B62"/>
+          </a:solidFill>
+          <a:ln>
+            <a:noFill/>
+          </a:ln>
+        </p:spPr>
+        <p:style>
+          <a:lnRef idx="1">
+            <a:schemeClr val="accent1"/>
+          </a:lnRef>
+          <a:fillRef idx="3">
+            <a:schemeClr val="accent1"/>
+          </a:fillRef>
+          <a:effectRef idx="2">
+            <a:schemeClr val="accent1"/>
+          </a:effectRef>
+          <a:fontRef idx="minor">
+            <a:schemeClr val="lt1"/>
+          </a:fontRef>
+        </p:style>
+        <p:txBody>
+          <a:bodyPr rtlCol="0" anchor="ctr"/>
+          <a:lstStyle/>
+          <a:p>
+            <a:pPr algn="ctr"/>
+          </a:p>
+        </p:txBody>
+      </p:sp>
+      <p:sp>
+        <p:nvSpPr>
+          <p:cNvPr id="35" name="Тип района 2"/>
+          <p:cNvSpPr txBox="1"/>
+          <p:nvPr/>
+        </p:nvSpPr>
+        <p:spPr>
+          <a:xfrm>
+            <a:off x="7333488" y="2103120"/>
+            <a:ext cx="4279392" cy="292608"/>
+          </a:xfrm>
+          <a:prstGeom prst="rect">
+            <a:avLst/>
+          </a:prstGeom>
+          <a:noFill/>
+        </p:spPr>
+        <p:txBody>
+          <a:bodyPr wrap="square" lIns="0" rIns="0" tIns="0" bIns="0">
+            <a:spAutoFit/>
+          </a:bodyPr>
+          <a:lstStyle/>
+          <a:p>
+            <a:r>
+              <a:rPr sz="1450" b="1">
+                <a:solidFill>
+                  <a:srgbClr val="1F2328"/>
+                </a:solidFill>
+              </a:rPr>
+              <a:t>Обеспеченные срединные районы</a:t>
+            </a:r>
+          </a:p>
+        </p:txBody>
+      </p:sp>
+      <p:sp>
+        <p:nvSpPr>
+          <p:cNvPr id="36" name="TextBox 35"/>
+          <p:cNvSpPr txBox="1"/>
+          <p:nvPr/>
+        </p:nvSpPr>
+        <p:spPr>
+          <a:xfrm>
+            <a:off x="7333488" y="2414015"/>
+            <a:ext cx="4279392" cy="237744"/>
+          </a:xfrm>
+          <a:prstGeom prst="rect">
+            <a:avLst/>
+          </a:prstGeom>
+          <a:noFill/>
+        </p:spPr>
+        <p:txBody>
+          <a:bodyPr wrap="square" lIns="0" rIns="0" tIns="0" bIns="0">
+            <a:spAutoFit/>
+          </a:bodyPr>
+          <a:lstStyle/>
+          <a:p>
+            <a:r>
+              <a:rPr sz="1200" b="0">
+                <a:solidFill>
+                  <a:srgbClr val="616975"/>
+                </a:solidFill>
+              </a:rPr>
+              <a:t>66 районов: 32 в Москве, 34 в Петербурге</a:t>
+            </a:r>
+          </a:p>
+        </p:txBody>
+      </p:sp>
+      <p:sp>
+        <p:nvSpPr>
+          <p:cNvPr id="37" name="TextBox 36"/>
+          <p:cNvSpPr txBox="1"/>
+          <p:nvPr/>
+        </p:nvSpPr>
+        <p:spPr>
+          <a:xfrm>
+            <a:off x="7333488" y="2651760"/>
+            <a:ext cx="4279392" cy="237744"/>
+          </a:xfrm>
+          <a:prstGeom prst="rect">
+            <a:avLst/>
+          </a:prstGeom>
+          <a:noFill/>
+        </p:spPr>
+        <p:txBody>
+          <a:bodyPr wrap="square" lIns="0" rIns="0" tIns="0" bIns="0">
+            <a:spAutoFit/>
+          </a:bodyPr>
+          <a:lstStyle/>
+          <a:p>
+            <a:r>
+              <a:rPr sz="1200" b="0">
+                <a:solidFill>
+                  <a:srgbClr val="616975"/>
+                </a:solidFill>
+              </a:rPr>
+              <a:t>траты 48 709 ₽ · продукты 31% · общепит 8,5%</a:t>
+            </a:r>
+          </a:p>
+        </p:txBody>
+      </p:sp>
+      <p:sp>
+        <p:nvSpPr>
+          <p:cNvPr id="38" name="Цвет типа 3"/>
+          <p:cNvSpPr/>
+          <p:nvPr/>
+        </p:nvSpPr>
+        <p:spPr>
+          <a:xfrm>
+            <a:off x="6949440" y="3008376"/>
+            <a:ext cx="237744" cy="237744"/>
+          </a:xfrm>
+          <a:prstGeom prst="roundRect">
+            <a:avLst/>
+          </a:prstGeom>
+          <a:solidFill>
+            <a:srgbClr val="CF5A90"/>
+          </a:solidFill>
+          <a:ln>
+            <a:noFill/>
+          </a:ln>
+        </p:spPr>
+        <p:style>
+          <a:lnRef idx="1">
+            <a:schemeClr val="accent1"/>
+          </a:lnRef>
+          <a:fillRef idx="3">
+            <a:schemeClr val="accent1"/>
+          </a:fillRef>
+          <a:effectRef idx="2">
+            <a:schemeClr val="accent1"/>
+          </a:effectRef>
+          <a:fontRef idx="minor">
+            <a:schemeClr val="lt1"/>
+          </a:fontRef>
+        </p:style>
+        <p:txBody>
+          <a:bodyPr rtlCol="0" anchor="ctr"/>
+          <a:lstStyle/>
+          <a:p>
+            <a:pPr algn="ctr"/>
+          </a:p>
+        </p:txBody>
+      </p:sp>
+      <p:sp>
+        <p:nvSpPr>
+          <p:cNvPr id="39" name="Тип района 3"/>
+          <p:cNvSpPr txBox="1"/>
+          <p:nvPr/>
+        </p:nvSpPr>
+        <p:spPr>
+          <a:xfrm>
+            <a:off x="7333488" y="2971800"/>
+            <a:ext cx="4279392" cy="292608"/>
+          </a:xfrm>
+          <a:prstGeom prst="rect">
+            <a:avLst/>
+          </a:prstGeom>
+          <a:noFill/>
+        </p:spPr>
+        <p:txBody>
+          <a:bodyPr wrap="square" lIns="0" rIns="0" tIns="0" bIns="0">
+            <a:spAutoFit/>
+          </a:bodyPr>
+          <a:lstStyle/>
+          <a:p>
+            <a:r>
+              <a:rPr sz="1450" b="1">
+                <a:solidFill>
+                  <a:srgbClr val="1F2328"/>
+                </a:solidFill>
+              </a:rPr>
+              <a:t>Спальные районы Москвы</a:t>
+            </a:r>
+          </a:p>
+        </p:txBody>
+      </p:sp>
+      <p:sp>
+        <p:nvSpPr>
+          <p:cNvPr id="40" name="TextBox 39"/>
+          <p:cNvSpPr txBox="1"/>
+          <p:nvPr/>
+        </p:nvSpPr>
+        <p:spPr>
+          <a:xfrm>
+            <a:off x="7333488" y="3282696"/>
+            <a:ext cx="4279392" cy="237744"/>
+          </a:xfrm>
+          <a:prstGeom prst="rect">
+            <a:avLst/>
+          </a:prstGeom>
+          <a:noFill/>
+        </p:spPr>
+        <p:txBody>
+          <a:bodyPr wrap="square" lIns="0" rIns="0" tIns="0" bIns="0">
+            <a:spAutoFit/>
+          </a:bodyPr>
+          <a:lstStyle/>
+          <a:p>
+            <a:r>
+              <a:rPr sz="1200" b="0">
+                <a:solidFill>
+                  <a:srgbClr val="616975"/>
+                </a:solidFill>
+              </a:rPr>
+              <a:t>60 районов: 52 в Москве, 8 в Петербурге</a:t>
+            </a:r>
+          </a:p>
+        </p:txBody>
+      </p:sp>
+      <p:sp>
+        <p:nvSpPr>
+          <p:cNvPr id="41" name="TextBox 40"/>
+          <p:cNvSpPr txBox="1"/>
+          <p:nvPr/>
+        </p:nvSpPr>
+        <p:spPr>
+          <a:xfrm>
+            <a:off x="7333488" y="3520440"/>
+            <a:ext cx="4279392" cy="237744"/>
+          </a:xfrm>
+          <a:prstGeom prst="rect">
+            <a:avLst/>
+          </a:prstGeom>
+          <a:noFill/>
+        </p:spPr>
+        <p:txBody>
+          <a:bodyPr wrap="square" lIns="0" rIns="0" tIns="0" bIns="0">
+            <a:spAutoFit/>
+          </a:bodyPr>
+          <a:lstStyle/>
+          <a:p>
+            <a:r>
+              <a:rPr sz="1200" b="0">
+                <a:solidFill>
+                  <a:srgbClr val="616975"/>
+                </a:solidFill>
+              </a:rPr>
+              <a:t>траты 46 767 ₽ · продукты 33% · общепит 7,3%</a:t>
+            </a:r>
+          </a:p>
+        </p:txBody>
+      </p:sp>
+      <p:sp>
+        <p:nvSpPr>
+          <p:cNvPr id="42" name="Цвет типа 4"/>
+          <p:cNvSpPr/>
+          <p:nvPr/>
+        </p:nvSpPr>
+        <p:spPr>
+          <a:xfrm>
+            <a:off x="6949440" y="3877056"/>
+            <a:ext cx="237744" cy="237744"/>
+          </a:xfrm>
+          <a:prstGeom prst="roundRect">
+            <a:avLst/>
+          </a:prstGeom>
+          <a:solidFill>
+            <a:srgbClr val="E28AB2"/>
+          </a:solidFill>
+          <a:ln>
+            <a:noFill/>
+          </a:ln>
+        </p:spPr>
+        <p:style>
+          <a:lnRef idx="1">
+            <a:schemeClr val="accent1"/>
+          </a:lnRef>
+          <a:fillRef idx="3">
+            <a:schemeClr val="accent1"/>
+          </a:fillRef>
+          <a:effectRef idx="2">
+            <a:schemeClr val="accent1"/>
+          </a:effectRef>
+          <a:fontRef idx="minor">
+            <a:schemeClr val="lt1"/>
+          </a:fontRef>
+        </p:style>
+        <p:txBody>
+          <a:bodyPr rtlCol="0" anchor="ctr"/>
+          <a:lstStyle/>
+          <a:p>
+            <a:pPr algn="ctr"/>
+          </a:p>
+        </p:txBody>
+      </p:sp>
+      <p:sp>
+        <p:nvSpPr>
+          <p:cNvPr id="43" name="Тип района 4"/>
+          <p:cNvSpPr txBox="1"/>
+          <p:nvPr/>
+        </p:nvSpPr>
+        <p:spPr>
+          <a:xfrm>
+            <a:off x="7333488" y="3840480"/>
+            <a:ext cx="4279392" cy="292608"/>
+          </a:xfrm>
+          <a:prstGeom prst="rect">
+            <a:avLst/>
+          </a:prstGeom>
+          <a:noFill/>
+        </p:spPr>
+        <p:txBody>
+          <a:bodyPr wrap="square" lIns="0" rIns="0" tIns="0" bIns="0">
+            <a:spAutoFit/>
+          </a:bodyPr>
+          <a:lstStyle/>
+          <a:p>
+            <a:r>
+              <a:rPr sz="1450" b="1">
+                <a:solidFill>
+                  <a:srgbClr val="1F2328"/>
+                </a:solidFill>
+              </a:rPr>
+              <a:t>Городские районы Петербурга</a:t>
+            </a:r>
+          </a:p>
+        </p:txBody>
+      </p:sp>
+      <p:sp>
+        <p:nvSpPr>
+          <p:cNvPr id="44" name="TextBox 43"/>
+          <p:cNvSpPr txBox="1"/>
+          <p:nvPr/>
+        </p:nvSpPr>
+        <p:spPr>
+          <a:xfrm>
+            <a:off x="7333488" y="4151376"/>
+            <a:ext cx="4279392" cy="237744"/>
+          </a:xfrm>
+          <a:prstGeom prst="rect">
+            <a:avLst/>
+          </a:prstGeom>
+          <a:noFill/>
+        </p:spPr>
+        <p:txBody>
+          <a:bodyPr wrap="square" lIns="0" rIns="0" tIns="0" bIns="0">
+            <a:spAutoFit/>
+          </a:bodyPr>
+          <a:lstStyle/>
+          <a:p>
+            <a:r>
+              <a:rPr sz="1200" b="0">
+                <a:solidFill>
+                  <a:srgbClr val="616975"/>
+                </a:solidFill>
+              </a:rPr>
+              <a:t>43 района: 3 в Москве, 40 в Петербурге</a:t>
+            </a:r>
+          </a:p>
+        </p:txBody>
+      </p:sp>
+      <p:sp>
+        <p:nvSpPr>
+          <p:cNvPr id="45" name="TextBox 44"/>
+          <p:cNvSpPr txBox="1"/>
+          <p:nvPr/>
+        </p:nvSpPr>
+        <p:spPr>
+          <a:xfrm>
+            <a:off x="7333488" y="4389120"/>
+            <a:ext cx="4279392" cy="237744"/>
+          </a:xfrm>
+          <a:prstGeom prst="rect">
+            <a:avLst/>
+          </a:prstGeom>
+          <a:noFill/>
+        </p:spPr>
+        <p:txBody>
+          <a:bodyPr wrap="square" lIns="0" rIns="0" tIns="0" bIns="0">
+            <a:spAutoFit/>
+          </a:bodyPr>
+          <a:lstStyle/>
+          <a:p>
+            <a:r>
+              <a:rPr sz="1200" b="0">
+                <a:solidFill>
+                  <a:srgbClr val="616975"/>
+                </a:solidFill>
+              </a:rPr>
+              <a:t>траты 41 894 ₽ · продукты 34% · общепит 7,7%</a:t>
+            </a:r>
+          </a:p>
+        </p:txBody>
+      </p:sp>
+      <p:sp>
+        <p:nvSpPr>
+          <p:cNvPr id="46" name="Цвет типа 5"/>
+          <p:cNvSpPr/>
+          <p:nvPr/>
+        </p:nvSpPr>
+        <p:spPr>
+          <a:xfrm>
+            <a:off x="6949440" y="4745736"/>
+            <a:ext cx="237744" cy="237744"/>
+          </a:xfrm>
+          <a:prstGeom prst="roundRect">
+            <a:avLst/>
+          </a:prstGeom>
+          <a:solidFill>
+            <a:srgbClr val="EDB5CF"/>
+          </a:solidFill>
+          <a:ln>
+            <a:noFill/>
+          </a:ln>
+        </p:spPr>
+        <p:style>
+          <a:lnRef idx="1">
+            <a:schemeClr val="accent1"/>
+          </a:lnRef>
+          <a:fillRef idx="3">
+            <a:schemeClr val="accent1"/>
+          </a:fillRef>
+          <a:effectRef idx="2">
+            <a:schemeClr val="accent1"/>
+          </a:effectRef>
+          <a:fontRef idx="minor">
+            <a:schemeClr val="lt1"/>
+          </a:fontRef>
+        </p:style>
+        <p:txBody>
+          <a:bodyPr rtlCol="0" anchor="ctr"/>
+          <a:lstStyle/>
+          <a:p>
+            <a:pPr algn="ctr"/>
+          </a:p>
+        </p:txBody>
+      </p:sp>
+      <p:sp>
+        <p:nvSpPr>
+          <p:cNvPr id="47" name="Тип района 5"/>
+          <p:cNvSpPr txBox="1"/>
+          <p:nvPr/>
+        </p:nvSpPr>
+        <p:spPr>
+          <a:xfrm>
+            <a:off x="7333488" y="4709160"/>
+            <a:ext cx="4279392" cy="292608"/>
+          </a:xfrm>
+          <a:prstGeom prst="rect">
+            <a:avLst/>
+          </a:prstGeom>
+          <a:noFill/>
+        </p:spPr>
+        <p:txBody>
+          <a:bodyPr wrap="square" lIns="0" rIns="0" tIns="0" bIns="0">
+            <a:spAutoFit/>
+          </a:bodyPr>
+          <a:lstStyle/>
+          <a:p>
+            <a:r>
+              <a:rPr sz="1450" b="1">
+                <a:solidFill>
+                  <a:srgbClr val="1F2328"/>
+                </a:solidFill>
+              </a:rPr>
+              <a:t>Периферия столиц</a:t>
+            </a:r>
+          </a:p>
+        </p:txBody>
+      </p:sp>
+      <p:sp>
+        <p:nvSpPr>
+          <p:cNvPr id="48" name="TextBox 47"/>
+          <p:cNvSpPr txBox="1"/>
+          <p:nvPr/>
+        </p:nvSpPr>
+        <p:spPr>
+          <a:xfrm>
+            <a:off x="7333488" y="5020056"/>
+            <a:ext cx="4279392" cy="237744"/>
+          </a:xfrm>
+          <a:prstGeom prst="rect">
+            <a:avLst/>
+          </a:prstGeom>
+          <a:noFill/>
+        </p:spPr>
+        <p:txBody>
+          <a:bodyPr wrap="square" lIns="0" rIns="0" tIns="0" bIns="0">
+            <a:spAutoFit/>
+          </a:bodyPr>
+          <a:lstStyle/>
+          <a:p>
+            <a:r>
+              <a:rPr sz="1200" b="0">
+                <a:solidFill>
+                  <a:srgbClr val="616975"/>
+                </a:solidFill>
+              </a:rPr>
+              <a:t>39 районов: 24 в Москве, 15 в Петербурге</a:t>
+            </a:r>
+          </a:p>
+        </p:txBody>
+      </p:sp>
+      <p:sp>
+        <p:nvSpPr>
+          <p:cNvPr id="49" name="TextBox 48"/>
+          <p:cNvSpPr txBox="1"/>
+          <p:nvPr/>
+        </p:nvSpPr>
+        <p:spPr>
+          <a:xfrm>
+            <a:off x="7333488" y="5257800"/>
+            <a:ext cx="4279392" cy="237744"/>
+          </a:xfrm>
+          <a:prstGeom prst="rect">
+            <a:avLst/>
+          </a:prstGeom>
+          <a:noFill/>
+        </p:spPr>
+        <p:txBody>
+          <a:bodyPr wrap="square" lIns="0" rIns="0" tIns="0" bIns="0">
+            <a:spAutoFit/>
+          </a:bodyPr>
+          <a:lstStyle/>
+          <a:p>
+            <a:r>
+              <a:rPr sz="1200" b="0">
+                <a:solidFill>
+                  <a:srgbClr val="616975"/>
+                </a:solidFill>
+              </a:rPr>
+              <a:t>траты 40 850 ₽ · продукты 35% · общепит 6,3%</a:t>
+            </a:r>
+          </a:p>
+        </p:txBody>
+      </p:sp>
+    </p:spTree>
+  </p:cSld>
+  <p:clrMapOvr>
+    <a:masterClrMapping/>
+  </p:clrMapOvr>
+</p:sld>
+</file>
+
+<file path=ppt/slides/slide14.xml><?xml version="1.0" encoding="utf-8"?>
+<p:sld xmlns:a="http://schemas.openxmlformats.org/drawingml/2006/main" xmlns:r="http://schemas.openxmlformats.org/officeDocument/2006/relationships" xmlns:p="http://schemas.openxmlformats.org/presentationml/2006/main">
   <p:cSld name="Slide 13">
     <p:spTree>
       <p:nvGrpSpPr>
@@ -8711,7 +9690,7 @@
                   <a:srgbClr val="3E4550"/>
                 </a:solidFill>
               </a:rPr>
-              <a:t>сельская Сибирь каждое лето</a:t>
+              <a:t>сельская Сибирь и Север летом</a:t>
             </a:r>
             <a:endParaRPr lang="en-US" sz="1500" dirty="0"/>
           </a:p>
@@ -8806,7 +9785,7 @@
 </p:sld>
 </file>
 
-<file path=ppt/slides/slide14.xml><?xml version="1.0" encoding="utf-8"?>
+<file path=ppt/slides/slide15.xml><?xml version="1.0" encoding="utf-8"?>
 <p:sld xmlns:a="http://schemas.openxmlformats.org/drawingml/2006/main" xmlns:r="http://schemas.openxmlformats.org/officeDocument/2006/relationships" xmlns:p="http://schemas.openxmlformats.org/presentationml/2006/main">
   <p:cSld name="Slide 14">
     <p:spTree>
@@ -9002,7 +9981,7 @@
 </p:sld>
 </file>
 
-<file path=ppt/slides/slide15.xml><?xml version="1.0" encoding="utf-8"?>
+<file path=ppt/slides/slide16.xml><?xml version="1.0" encoding="utf-8"?>
 <p:sld xmlns:a="http://schemas.openxmlformats.org/drawingml/2006/main" xmlns:r="http://schemas.openxmlformats.org/officeDocument/2006/relationships" xmlns:p="http://schemas.openxmlformats.org/presentationml/2006/main">
   <p:cSld name="Slide 15">
     <p:spTree>
@@ -9378,7 +10357,7 @@
 </p:sld>
 </file>
 
-<file path=ppt/slides/slide16.xml><?xml version="1.0" encoding="utf-8"?>
+<file path=ppt/slides/slide17.xml><?xml version="1.0" encoding="utf-8"?>
 <p:sld xmlns:a="http://schemas.openxmlformats.org/drawingml/2006/main" xmlns:r="http://schemas.openxmlformats.org/officeDocument/2006/relationships" xmlns:p="http://schemas.openxmlformats.org/presentationml/2006/main">
   <p:cSld name="Slide 16">
     <p:spTree>
@@ -9495,6 +10474,10 @@
             <a:prstDash val="solid"/>
           </a:ln>
         </p:spPr>
+        <p:txBody>
+          <a:bodyPr/>
+          <a:p/>
+        </p:txBody>
       </p:sp>
       <p:pic>
         <p:nvPicPr>
@@ -9618,6 +10601,10 @@
             <a:prstDash val="solid"/>
           </a:ln>
         </p:spPr>
+        <p:txBody>
+          <a:bodyPr/>
+          <a:p/>
+        </p:txBody>
       </p:sp>
       <p:pic>
         <p:nvPicPr>
@@ -9741,6 +10728,10 @@
             <a:prstDash val="solid"/>
           </a:ln>
         </p:spPr>
+        <p:txBody>
+          <a:bodyPr/>
+          <a:p/>
+        </p:txBody>
       </p:sp>
       <p:pic>
         <p:nvPicPr>
@@ -9891,7 +10882,7 @@
 </p:sld>
 </file>
 
-<file path=ppt/slides/slide17.xml><?xml version="1.0" encoding="utf-8"?>
+<file path=ppt/slides/slide18.xml><?xml version="1.0" encoding="utf-8"?>
 <p:sld xmlns:a="http://schemas.openxmlformats.org/drawingml/2006/main" xmlns:r="http://schemas.openxmlformats.org/officeDocument/2006/relationships" xmlns:p="http://schemas.openxmlformats.org/presentationml/2006/main">
   <p:cSld name="Slide 17">
     <p:spTree>
@@ -10008,6 +10999,10 @@
             <a:prstDash val="solid"/>
           </a:ln>
         </p:spPr>
+        <p:txBody>
+          <a:bodyPr/>
+          <a:p/>
+        </p:txBody>
       </p:sp>
       <p:sp>
         <p:nvSpPr>
@@ -10210,6 +11205,10 @@
             <a:prstDash val="solid"/>
           </a:ln>
         </p:spPr>
+        <p:txBody>
+          <a:bodyPr/>
+          <a:p/>
+        </p:txBody>
       </p:sp>
       <p:sp>
         <p:nvSpPr>
@@ -10418,7 +11417,7 @@
 </p:sld>
 </file>
 
-<file path=ppt/slides/slide18.xml><?xml version="1.0" encoding="utf-8"?>
+<file path=ppt/slides/slide19.xml><?xml version="1.0" encoding="utf-8"?>
 <p:sld xmlns:a="http://schemas.openxmlformats.org/drawingml/2006/main" xmlns:r="http://schemas.openxmlformats.org/officeDocument/2006/relationships" xmlns:p="http://schemas.openxmlformats.org/presentationml/2006/main">
   <p:cSld name="Slide 18">
     <p:spTree>
@@ -10842,6 +11841,10 @@
             <a:prstDash val="solid"/>
           </a:ln>
         </p:spPr>
+        <p:txBody>
+          <a:bodyPr/>
+          <a:p/>
+        </p:txBody>
       </p:sp>
       <p:sp>
         <p:nvSpPr>
@@ -10945,7 +11948,7 @@
                   <a:srgbClr val="616975"/>
                 </a:solidFill>
               </a:rPr>
-              <a:t>все МО с данными СберИндекса не меньше 18 месяцев из 24</a:t>
+              <a:t>МО с данными за 18+ месяцев из 24, без внутригородских территорий столиц</a:t>
             </a:r>
             <a:endParaRPr lang="en-US" sz="1400" dirty="0"/>
           </a:p>
@@ -10977,6 +11980,10 @@
             <a:prstDash val="solid"/>
           </a:ln>
         </p:spPr>
+        <p:txBody>
+          <a:bodyPr/>
+          <a:p/>
+        </p:txBody>
       </p:sp>
       <p:sp>
         <p:nvSpPr>
@@ -11112,6 +12119,10 @@
             <a:prstDash val="solid"/>
           </a:ln>
         </p:spPr>
+        <p:txBody>
+          <a:bodyPr/>
+          <a:p/>
+        </p:txBody>
       </p:sp>
       <p:sp>
         <p:nvSpPr>
@@ -11247,6 +12258,10 @@
             <a:prstDash val="solid"/>
           </a:ln>
         </p:spPr>
+        <p:txBody>
+          <a:bodyPr/>
+          <a:p/>
+        </p:txBody>
       </p:sp>
       <p:sp>
         <p:nvSpPr>
@@ -11526,6 +12541,10 @@
             <a:prstDash val="solid"/>
           </a:ln>
         </p:spPr>
+        <p:txBody>
+          <a:bodyPr/>
+          <a:p/>
+        </p:txBody>
       </p:sp>
       <p:sp>
         <p:nvSpPr>
@@ -11683,6 +12702,10 @@
             <a:prstDash val="solid"/>
           </a:ln>
         </p:spPr>
+        <p:txBody>
+          <a:bodyPr/>
+          <a:p/>
+        </p:txBody>
       </p:sp>
       <p:sp>
         <p:nvSpPr>
@@ -13954,6 +14977,10 @@
             <a:prstDash val="solid"/>
           </a:ln>
         </p:spPr>
+        <p:txBody>
+          <a:bodyPr/>
+          <a:p/>
+        </p:txBody>
       </p:sp>
       <p:sp>
         <p:nvSpPr>
@@ -20946,6 +21973,10 @@
             <a:prstDash val="solid"/>
           </a:ln>
         </p:spPr>
+        <p:txBody>
+          <a:bodyPr/>
+          <a:p/>
+        </p:txBody>
       </p:sp>
       <p:sp>
         <p:nvSpPr>
@@ -21225,6 +22256,10 @@
             <a:prstDash val="solid"/>
           </a:ln>
         </p:spPr>
+        <p:txBody>
+          <a:bodyPr/>
+          <a:p/>
+        </p:txBody>
       </p:sp>
       <p:sp>
         <p:nvSpPr>
